--- a/outputs/presentation_revised.pptx
+++ b/outputs/presentation_revised.pptx
@@ -12,6 +12,7 @@
     <p:sldId id="260" r:id="rId11"/>
     <p:sldId id="261" r:id="rId12"/>
     <p:sldId id="262" r:id="rId13"/>
+    <p:sldId id="263" r:id="rId14"/>
   </p:sldIdLst>
   <p:sldSz cx="12191695" cy="6858000" type="screen4x3"/>
   <p:notesSz cx="6858000" cy="9144000"/>
@@ -111,6 +112,256 @@
     </a:lvl9pPr>
   </p:defaultTextStyle>
 </p:presentation>
+</file>
+
+<file path=ppt/charts/chart1.xml><?xml version="1.0" encoding="utf-8"?>
+<c:chartSpace xmlns:c="http://schemas.openxmlformats.org/drawingml/2006/chart" xmlns:a="http://schemas.openxmlformats.org/drawingml/2006/main" xmlns:r="http://schemas.openxmlformats.org/officeDocument/2006/relationships">
+  <c:date1904 val="0"/>
+  <c:chart>
+    <c:autoTitleDeleted val="1"/>
+    <c:plotArea>
+      <c:barChart>
+        <c:barDir val="bar"/>
+        <c:grouping val="clustered"/>
+        <c:ser>
+          <c:idx val="0"/>
+          <c:order val="0"/>
+          <c:tx>
+            <c:strRef>
+              <c:f>Sheet1!$B$1</c:f>
+              <c:strCache>
+                <c:ptCount val="1"/>
+                <c:pt idx="0">
+                  <c:v>격차 점수</c:v>
+                </c:pt>
+              </c:strCache>
+            </c:strRef>
+          </c:tx>
+          <c:spPr>
+            <a:solidFill>
+              <a:srgbClr val="8FD0C8"/>
+            </a:solidFill>
+          </c:spPr>
+          <c:dPt>
+            <c:idx val="0"/>
+            <c:spPr>
+              <a:solidFill>
+                <a:srgbClr val="8FD0C8"/>
+              </a:solidFill>
+            </c:spPr>
+          </c:dPt>
+          <c:dPt>
+            <c:idx val="1"/>
+            <c:spPr>
+              <a:solidFill>
+                <a:srgbClr val="8FD0C8"/>
+              </a:solidFill>
+            </c:spPr>
+          </c:dPt>
+          <c:dPt>
+            <c:idx val="2"/>
+            <c:spPr>
+              <a:solidFill>
+                <a:srgbClr val="8FD0C8"/>
+              </a:solidFill>
+            </c:spPr>
+          </c:dPt>
+          <c:dPt>
+            <c:idx val="3"/>
+            <c:spPr>
+              <a:solidFill>
+                <a:srgbClr val="8FD0C8"/>
+              </a:solidFill>
+            </c:spPr>
+          </c:dPt>
+          <c:dPt>
+            <c:idx val="4"/>
+            <c:spPr>
+              <a:solidFill>
+                <a:srgbClr val="0F9688"/>
+              </a:solidFill>
+            </c:spPr>
+          </c:dPt>
+          <c:dPt>
+            <c:idx val="5"/>
+            <c:spPr>
+              <a:solidFill>
+                <a:srgbClr val="0F9688"/>
+              </a:solidFill>
+            </c:spPr>
+          </c:dPt>
+          <c:dPt>
+            <c:idx val="6"/>
+            <c:spPr>
+              <a:solidFill>
+                <a:srgbClr val="0F9688"/>
+              </a:solidFill>
+            </c:spPr>
+          </c:dPt>
+          <c:dPt>
+            <c:idx val="7"/>
+            <c:spPr>
+              <a:solidFill>
+                <a:srgbClr val="0F9688"/>
+              </a:solidFill>
+            </c:spPr>
+          </c:dPt>
+          <c:cat>
+            <c:strRef>
+              <c:f>Sheet1!$A$2:$A$9</c:f>
+              <c:strCache>
+                <c:ptCount val="8"/>
+                <c:pt idx="0">
+                  <c:v>청하면</c:v>
+                </c:pt>
+                <c:pt idx="1">
+                  <c:v>신광면</c:v>
+                </c:pt>
+                <c:pt idx="2">
+                  <c:v>동해면</c:v>
+                </c:pt>
+                <c:pt idx="3">
+                  <c:v>죽장면</c:v>
+                </c:pt>
+                <c:pt idx="4">
+                  <c:v>대송면</c:v>
+                </c:pt>
+                <c:pt idx="5">
+                  <c:v>호미곶면</c:v>
+                </c:pt>
+                <c:pt idx="6">
+                  <c:v>장기면</c:v>
+                </c:pt>
+                <c:pt idx="7">
+                  <c:v>구룡포읍</c:v>
+                </c:pt>
+              </c:strCache>
+            </c:strRef>
+          </c:cat>
+          <c:val>
+            <c:numRef>
+              <c:f>Sheet1!$B$2:$B$9</c:f>
+              <c:numCache>
+                <c:formatCode>General</c:formatCode>
+                <c:ptCount val="8"/>
+                <c:pt idx="0">
+                  <c:v>0.501</c:v>
+                </c:pt>
+                <c:pt idx="1">
+                  <c:v>0.505</c:v>
+                </c:pt>
+                <c:pt idx="2">
+                  <c:v>0.506</c:v>
+                </c:pt>
+                <c:pt idx="3">
+                  <c:v>0.54</c:v>
+                </c:pt>
+                <c:pt idx="4">
+                  <c:v>0.639</c:v>
+                </c:pt>
+                <c:pt idx="5">
+                  <c:v>0.711</c:v>
+                </c:pt>
+                <c:pt idx="6">
+                  <c:v>0.724</c:v>
+                </c:pt>
+                <c:pt idx="7">
+                  <c:v>0.883</c:v>
+                </c:pt>
+              </c:numCache>
+            </c:numRef>
+          </c:val>
+        </c:ser>
+        <c:dLbls>
+          <c:numFmt formatCode="0.00" sourceLinked="0"/>
+          <c:txPr>
+            <a:bodyPr/>
+            <a:lstStyle/>
+            <a:p>
+              <a:pPr>
+                <a:defRPr sz="1300">
+                  <a:latin typeface="Apple SD Gothic Neo"/>
+                </a:defRPr>
+              </a:pPr>
+            </a:p>
+          </c:txPr>
+          <c:dLblPos val="outEnd"/>
+          <c:showLegendKey val="0"/>
+          <c:showVal val="1"/>
+          <c:showCatName val="0"/>
+          <c:showSerName val="0"/>
+          <c:showPercent val="0"/>
+          <c:showBubbleSize val="0"/>
+          <c:showLeaderLines val="1"/>
+        </c:dLbls>
+        <c:gapWidth val="45"/>
+        <c:axId val="-2068027336"/>
+        <c:axId val="-2113994440"/>
+      </c:barChart>
+      <c:catAx>
+        <c:axId val="-2068027336"/>
+        <c:scaling>
+          <c:orientation val="minMax"/>
+        </c:scaling>
+        <c:delete val="0"/>
+        <c:axPos val="l"/>
+        <c:majorTickMark val="out"/>
+        <c:minorTickMark val="none"/>
+        <c:tickLblPos val="nextTo"/>
+        <c:spPr>
+          <a:ln>
+            <a:noFill/>
+          </a:ln>
+        </c:spPr>
+        <c:txPr>
+          <a:bodyPr/>
+          <a:lstStyle/>
+          <a:p>
+            <a:pPr>
+              <a:defRPr sz="1400">
+                <a:latin typeface="Apple SD Gothic Neo"/>
+              </a:defRPr>
+            </a:pPr>
+          </a:p>
+        </c:txPr>
+        <c:crossAx val="-2113994440"/>
+        <c:crosses val="autoZero"/>
+        <c:auto val="1"/>
+        <c:lblAlgn val="ctr"/>
+        <c:lblOffset val="100"/>
+        <c:noMultiLvlLbl val="0"/>
+      </c:catAx>
+      <c:valAx>
+        <c:axId val="-2113994440"/>
+        <c:scaling>
+          <c:max val="1.05"/>
+          <c:min val="0.0"/>
+        </c:scaling>
+        <c:delete/>
+        <c:axPos val="b"/>
+        <c:majorTickMark val="out"/>
+        <c:minorTickMark val="none"/>
+        <c:tickLblPos val="nextTo"/>
+        <c:crossAx val="-2068027336"/>
+        <c:crosses val="autoZero"/>
+      </c:valAx>
+    </c:plotArea>
+    <c:dispBlanksAs val="gap"/>
+  </c:chart>
+  <c:txPr>
+    <a:bodyPr/>
+    <a:lstStyle/>
+    <a:p>
+      <a:pPr>
+        <a:defRPr sz="1800"/>
+      </a:pPr>
+      <a:endParaRPr lang="en-US"/>
+    </a:p>
+  </c:txPr>
+  <c:externalData r:id="rId1">
+    <c:autoUpdate val="0"/>
+  </c:externalData>
+</c:chartSpace>
 </file>
 
 <file path=ppt/slideLayouts/slideLayout1.xml><?xml version="1.0" encoding="utf-8"?>
@@ -3096,14 +3347,58 @@
       <p:grpSpPr/>
       <p:sp>
         <p:nvSpPr>
-          <p:cNvPr id="2" name="TextBox 1"/>
+          <p:cNvPr id="2" name="Rectangle 1"/>
+          <p:cNvSpPr/>
+          <p:nvPr/>
+        </p:nvSpPr>
+        <p:spPr>
+          <a:xfrm>
+            <a:off x="548640" y="411480"/>
+            <a:ext cx="73152" cy="548640"/>
+          </a:xfrm>
+          <a:prstGeom prst="rect">
+            <a:avLst/>
+          </a:prstGeom>
+          <a:solidFill>
+            <a:srgbClr val="0F9688"/>
+          </a:solidFill>
+          <a:ln>
+            <a:noFill/>
+          </a:ln>
+          <a:effectLst/>
+        </p:spPr>
+        <p:style>
+          <a:lnRef idx="1">
+            <a:schemeClr val="accent1"/>
+          </a:lnRef>
+          <a:fillRef idx="3">
+            <a:schemeClr val="accent1"/>
+          </a:fillRef>
+          <a:effectRef idx="2">
+            <a:schemeClr val="accent1"/>
+          </a:effectRef>
+          <a:fontRef idx="minor">
+            <a:schemeClr val="lt1"/>
+          </a:fontRef>
+        </p:style>
+        <p:txBody>
+          <a:bodyPr rtlCol="0" anchor="ctr"/>
+          <a:lstStyle/>
+          <a:p>
+            <a:pPr algn="ctr"/>
+          </a:p>
+        </p:txBody>
+      </p:sp>
+      <p:sp>
+        <p:nvSpPr>
+          <p:cNvPr id="3" name="TextBox 2"/>
           <p:cNvSpPr txBox="1"/>
           <p:nvPr/>
         </p:nvSpPr>
         <p:spPr>
           <a:xfrm>
-            <a:off x="548640" y="320040"/>
-            <a:ext cx="11064240" cy="822960"/>
+            <a:off x="777240" y="347472"/>
+            <a:ext cx="10515600" cy="731520"/>
           </a:xfrm>
           <a:prstGeom prst="rect">
             <a:avLst/>
@@ -3111,38 +3406,128 @@
           <a:noFill/>
         </p:spPr>
         <p:txBody>
-          <a:bodyPr wrap="square">
+          <a:bodyPr wrap="square" anchor="ctr">
             <a:spAutoFit/>
           </a:bodyPr>
           <a:lstStyle/>
           <a:p>
             <a:pPr>
               <a:spcAft>
-                <a:spcPts val="600"/>
+                <a:spcPts val="500"/>
               </a:spcAft>
             </a:pPr>
             <a:r>
               <a:rPr sz="2800" b="1">
                 <a:solidFill>
-                  <a:srgbClr val="1C5CAB"/>
+                  <a:srgbClr val="141E2E"/>
                 </a:solidFill>
                 <a:latin typeface="Apple SD Gothic Neo"/>
               </a:rPr>
-              <a:t>핵심 차별점: 2단 파이프라인 + 근거 기반 LLM 리포트</a:t>
-            </a:r>
-          </a:p>
-        </p:txBody>
-      </p:sp>
-      <p:sp>
-        <p:nvSpPr>
-          <p:cNvPr id="3" name="TextBox 2"/>
+              <a:t>이 프로젝트가 다른 점</a:t>
+            </a:r>
+          </a:p>
+        </p:txBody>
+      </p:sp>
+      <p:sp>
+        <p:nvSpPr>
+          <p:cNvPr id="4" name="Rectangle 3"/>
+          <p:cNvSpPr/>
+          <p:nvPr/>
+        </p:nvSpPr>
+        <p:spPr>
+          <a:xfrm>
+            <a:off x="548640" y="1645920"/>
+            <a:ext cx="5440680" cy="2286000"/>
+          </a:xfrm>
+          <a:prstGeom prst="rect">
+            <a:avLst/>
+          </a:prstGeom>
+          <a:solidFill>
+            <a:srgbClr val="F6F8FA"/>
+          </a:solidFill>
+          <a:ln w="9525">
+            <a:solidFill>
+              <a:srgbClr val="E2E6EA"/>
+            </a:solidFill>
+          </a:ln>
+          <a:effectLst/>
+        </p:spPr>
+        <p:style>
+          <a:lnRef idx="1">
+            <a:schemeClr val="accent1"/>
+          </a:lnRef>
+          <a:fillRef idx="3">
+            <a:schemeClr val="accent1"/>
+          </a:fillRef>
+          <a:effectRef idx="2">
+            <a:schemeClr val="accent1"/>
+          </a:effectRef>
+          <a:fontRef idx="minor">
+            <a:schemeClr val="lt1"/>
+          </a:fontRef>
+        </p:style>
+        <p:txBody>
+          <a:bodyPr rtlCol="0" anchor="ctr"/>
+          <a:lstStyle/>
+          <a:p>
+            <a:pPr algn="ctr"/>
+          </a:p>
+        </p:txBody>
+      </p:sp>
+      <p:sp>
+        <p:nvSpPr>
+          <p:cNvPr id="5" name="Rectangle 4"/>
+          <p:cNvSpPr/>
+          <p:nvPr/>
+        </p:nvSpPr>
+        <p:spPr>
+          <a:xfrm>
+            <a:off x="548640" y="1645920"/>
+            <a:ext cx="5440680" cy="64008"/>
+          </a:xfrm>
+          <a:prstGeom prst="rect">
+            <a:avLst/>
+          </a:prstGeom>
+          <a:solidFill>
+            <a:srgbClr val="0F9688"/>
+          </a:solidFill>
+          <a:ln>
+            <a:noFill/>
+          </a:ln>
+          <a:effectLst/>
+        </p:spPr>
+        <p:style>
+          <a:lnRef idx="1">
+            <a:schemeClr val="accent1"/>
+          </a:lnRef>
+          <a:fillRef idx="3">
+            <a:schemeClr val="accent1"/>
+          </a:fillRef>
+          <a:effectRef idx="2">
+            <a:schemeClr val="accent1"/>
+          </a:effectRef>
+          <a:fontRef idx="minor">
+            <a:schemeClr val="lt1"/>
+          </a:fontRef>
+        </p:style>
+        <p:txBody>
+          <a:bodyPr rtlCol="0" anchor="ctr"/>
+          <a:lstStyle/>
+          <a:p>
+            <a:pPr algn="ctr"/>
+          </a:p>
+        </p:txBody>
+      </p:sp>
+      <p:sp>
+        <p:nvSpPr>
+          <p:cNvPr id="6" name="TextBox 5"/>
           <p:cNvSpPr txBox="1"/>
           <p:nvPr/>
         </p:nvSpPr>
         <p:spPr>
           <a:xfrm>
-            <a:off x="548640" y="1280160"/>
-            <a:ext cx="11064240" cy="5120640"/>
+            <a:off x="777240" y="1920240"/>
+            <a:ext cx="4983480" cy="1920240"/>
           </a:xfrm>
           <a:prstGeom prst="rect">
             <a:avLst/>
@@ -3150,67 +3535,224 @@
           <a:noFill/>
         </p:spPr>
         <p:txBody>
-          <a:bodyPr wrap="square">
+          <a:bodyPr wrap="square" anchor="t">
             <a:spAutoFit/>
           </a:bodyPr>
           <a:lstStyle/>
           <a:p>
             <a:pPr>
               <a:spcAft>
-                <a:spcPts val="600"/>
+                <a:spcPts val="500"/>
               </a:spcAft>
             </a:pPr>
             <a:r>
-              <a:rPr sz="1800" b="0">
+              <a:rPr sz="1900" b="1">
+                <a:solidFill>
+                  <a:srgbClr val="141E2E"/>
+                </a:solidFill>
                 <a:latin typeface="Apple SD Gothic Neo"/>
               </a:rPr>
-              <a:t>1단계  2SFCA 공간분석</a:t>
+              <a:t>1. 부족한 곳을 찾는다</a:t>
             </a:r>
           </a:p>
           <a:p>
             <a:pPr>
               <a:spcAft>
-                <a:spcPts val="600"/>
+                <a:spcPts val="500"/>
               </a:spcAft>
             </a:pPr>
             <a:r>
-              <a:rPr sz="1800" b="0">
+              <a:rPr sz="1700" b="0">
+                <a:solidFill>
+                  <a:srgbClr val="555F6D"/>
+                </a:solidFill>
                 <a:latin typeface="Apple SD Gothic Neo"/>
               </a:rPr>
-              <a:t>공급량·수요량·거리를 결합해 행정동별 의료 접근성을 지수화하고, 외국인 비율과 합쳐 격차 점수를 계산합니다. 수요점은 집계구 1,046개의 인구로 가중한 중심점입니다.</a:t>
-            </a:r>
-          </a:p>
+              <a:t>병원·약국 위치와 인구를 놓고 동마다 의료 접근성을 계산했습니다. 여기에 외국인 비율을 겹쳐서, 어느 동이 가장 아쉬운지 점수로 뽑았습니다.</a:t>
+            </a:r>
+          </a:p>
+        </p:txBody>
+      </p:sp>
+      <p:sp>
+        <p:nvSpPr>
+          <p:cNvPr id="7" name="Rectangle 6"/>
+          <p:cNvSpPr/>
+          <p:nvPr/>
+        </p:nvSpPr>
+        <p:spPr>
+          <a:xfrm>
+            <a:off x="6199632" y="1645920"/>
+            <a:ext cx="5440680" cy="2286000"/>
+          </a:xfrm>
+          <a:prstGeom prst="rect">
+            <a:avLst/>
+          </a:prstGeom>
+          <a:solidFill>
+            <a:srgbClr val="F6F8FA"/>
+          </a:solidFill>
+          <a:ln w="9525">
+            <a:solidFill>
+              <a:srgbClr val="E2E6EA"/>
+            </a:solidFill>
+          </a:ln>
+          <a:effectLst/>
+        </p:spPr>
+        <p:style>
+          <a:lnRef idx="1">
+            <a:schemeClr val="accent1"/>
+          </a:lnRef>
+          <a:fillRef idx="3">
+            <a:schemeClr val="accent1"/>
+          </a:fillRef>
+          <a:effectRef idx="2">
+            <a:schemeClr val="accent1"/>
+          </a:effectRef>
+          <a:fontRef idx="minor">
+            <a:schemeClr val="lt1"/>
+          </a:fontRef>
+        </p:style>
+        <p:txBody>
+          <a:bodyPr rtlCol="0" anchor="ctr"/>
+          <a:lstStyle/>
+          <a:p>
+            <a:pPr algn="ctr"/>
+          </a:p>
+        </p:txBody>
+      </p:sp>
+      <p:sp>
+        <p:nvSpPr>
+          <p:cNvPr id="8" name="Rectangle 7"/>
+          <p:cNvSpPr/>
+          <p:nvPr/>
+        </p:nvSpPr>
+        <p:spPr>
+          <a:xfrm>
+            <a:off x="6199632" y="1645920"/>
+            <a:ext cx="5440680" cy="64008"/>
+          </a:xfrm>
+          <a:prstGeom prst="rect">
+            <a:avLst/>
+          </a:prstGeom>
+          <a:solidFill>
+            <a:srgbClr val="0F9688"/>
+          </a:solidFill>
+          <a:ln>
+            <a:noFill/>
+          </a:ln>
+          <a:effectLst/>
+        </p:spPr>
+        <p:style>
+          <a:lnRef idx="1">
+            <a:schemeClr val="accent1"/>
+          </a:lnRef>
+          <a:fillRef idx="3">
+            <a:schemeClr val="accent1"/>
+          </a:fillRef>
+          <a:effectRef idx="2">
+            <a:schemeClr val="accent1"/>
+          </a:effectRef>
+          <a:fontRef idx="minor">
+            <a:schemeClr val="lt1"/>
+          </a:fontRef>
+        </p:style>
+        <p:txBody>
+          <a:bodyPr rtlCol="0" anchor="ctr"/>
+          <a:lstStyle/>
+          <a:p>
+            <a:pPr algn="ctr"/>
+          </a:p>
+        </p:txBody>
+      </p:sp>
+      <p:sp>
+        <p:nvSpPr>
+          <p:cNvPr id="9" name="TextBox 8"/>
+          <p:cNvSpPr txBox="1"/>
+          <p:nvPr/>
+        </p:nvSpPr>
+        <p:spPr>
+          <a:xfrm>
+            <a:off x="6428232" y="1920240"/>
+            <a:ext cx="4983480" cy="1920240"/>
+          </a:xfrm>
+          <a:prstGeom prst="rect">
+            <a:avLst/>
+          </a:prstGeom>
+          <a:noFill/>
+        </p:spPr>
+        <p:txBody>
+          <a:bodyPr wrap="square" anchor="t">
+            <a:spAutoFit/>
+          </a:bodyPr>
+          <a:lstStyle/>
           <a:p>
             <a:pPr>
               <a:spcAft>
-                <a:spcPts val="600"/>
+                <a:spcPts val="500"/>
               </a:spcAft>
             </a:pPr>
+            <a:r>
+              <a:rPr sz="1900" b="1">
+                <a:solidFill>
+                  <a:srgbClr val="141E2E"/>
+                </a:solidFill>
+                <a:latin typeface="Apple SD Gothic Neo"/>
+              </a:rPr>
+              <a:t>2. 정책 초안을 쓴다</a:t>
+            </a:r>
           </a:p>
           <a:p>
             <a:pPr>
               <a:spcAft>
-                <a:spcPts val="600"/>
+                <a:spcPts val="500"/>
               </a:spcAft>
             </a:pPr>
             <a:r>
-              <a:rPr sz="1800" b="0">
+              <a:rPr sz="1700" b="0">
+                <a:solidFill>
+                  <a:srgbClr val="555F6D"/>
+                </a:solidFill>
                 <a:latin typeface="Apple SD Gothic Neo"/>
               </a:rPr>
-              <a:t>2단계  LLM 정책 카드 생성</a:t>
-            </a:r>
-          </a:p>
+              <a:t>점수와 동별 사정을 LLM에 넘겨서 29개 동의 정책 카드를 썼습니다. 숫자가 틀리거나 이상한 제안이 나오면 코드가 걸러내고 다시 쓰게 했습니다.</a:t>
+            </a:r>
+          </a:p>
+        </p:txBody>
+      </p:sp>
+      <p:sp>
+        <p:nvSpPr>
+          <p:cNvPr id="10" name="TextBox 9"/>
+          <p:cNvSpPr txBox="1"/>
+          <p:nvPr/>
+        </p:nvSpPr>
+        <p:spPr>
+          <a:xfrm>
+            <a:off x="548640" y="4297680"/>
+            <a:ext cx="11064240" cy="731520"/>
+          </a:xfrm>
+          <a:prstGeom prst="rect">
+            <a:avLst/>
+          </a:prstGeom>
+          <a:noFill/>
+        </p:spPr>
+        <p:txBody>
+          <a:bodyPr wrap="square" anchor="t">
+            <a:spAutoFit/>
+          </a:bodyPr>
+          <a:lstStyle/>
           <a:p>
             <a:pPr>
               <a:spcAft>
-                <a:spcPts val="600"/>
+                <a:spcPts val="500"/>
               </a:spcAft>
             </a:pPr>
             <a:r>
-              <a:rPr sz="1800" b="0">
+              <a:rPr sz="1500" b="0">
+                <a:solidFill>
+                  <a:srgbClr val="555F6D"/>
+                </a:solidFill>
                 <a:latin typeface="Apple SD Gothic Neo"/>
               </a:rPr>
-              <a:t>격차 점수·행정동 사실(외국인 수·비율, 면/읍/동 성격, 격차 유형)과 공개 실태조사 수치를 근거로 29개 행정동의 정책 카드를 만들고, 수치·한자·부적절 제안을 코드로 걸러 냅니다.</a:t>
+              <a:t>수요 위치는 집계구 1,046개의 인구로 가중한 중심점을 썼습니다.</a:t>
             </a:r>
           </a:p>
         </p:txBody>
@@ -3235,14 +3777,58 @@
       <p:grpSpPr/>
       <p:sp>
         <p:nvSpPr>
-          <p:cNvPr id="2" name="TextBox 1"/>
+          <p:cNvPr id="2" name="Rectangle 1"/>
+          <p:cNvSpPr/>
+          <p:nvPr/>
+        </p:nvSpPr>
+        <p:spPr>
+          <a:xfrm>
+            <a:off x="548640" y="411480"/>
+            <a:ext cx="73152" cy="548640"/>
+          </a:xfrm>
+          <a:prstGeom prst="rect">
+            <a:avLst/>
+          </a:prstGeom>
+          <a:solidFill>
+            <a:srgbClr val="0F9688"/>
+          </a:solidFill>
+          <a:ln>
+            <a:noFill/>
+          </a:ln>
+          <a:effectLst/>
+        </p:spPr>
+        <p:style>
+          <a:lnRef idx="1">
+            <a:schemeClr val="accent1"/>
+          </a:lnRef>
+          <a:fillRef idx="3">
+            <a:schemeClr val="accent1"/>
+          </a:fillRef>
+          <a:effectRef idx="2">
+            <a:schemeClr val="accent1"/>
+          </a:effectRef>
+          <a:fontRef idx="minor">
+            <a:schemeClr val="lt1"/>
+          </a:fontRef>
+        </p:style>
+        <p:txBody>
+          <a:bodyPr rtlCol="0" anchor="ctr"/>
+          <a:lstStyle/>
+          <a:p>
+            <a:pPr algn="ctr"/>
+          </a:p>
+        </p:txBody>
+      </p:sp>
+      <p:sp>
+        <p:nvSpPr>
+          <p:cNvPr id="3" name="TextBox 2"/>
           <p:cNvSpPr txBox="1"/>
           <p:nvPr/>
         </p:nvSpPr>
         <p:spPr>
           <a:xfrm>
-            <a:off x="548640" y="320040"/>
-            <a:ext cx="11064240" cy="822960"/>
+            <a:off x="777240" y="347472"/>
+            <a:ext cx="10515600" cy="731520"/>
           </a:xfrm>
           <a:prstGeom prst="rect">
             <a:avLst/>
@@ -3250,38 +3836,128 @@
           <a:noFill/>
         </p:spPr>
         <p:txBody>
-          <a:bodyPr wrap="square">
+          <a:bodyPr wrap="square" anchor="ctr">
             <a:spAutoFit/>
           </a:bodyPr>
           <a:lstStyle/>
           <a:p>
             <a:pPr>
               <a:spcAft>
-                <a:spcPts val="600"/>
+                <a:spcPts val="500"/>
               </a:spcAft>
             </a:pPr>
             <a:r>
               <a:rPr sz="2800" b="1">
                 <a:solidFill>
-                  <a:srgbClr val="1C5CAB"/>
+                  <a:srgbClr val="141E2E"/>
                 </a:solidFill>
                 <a:latin typeface="Apple SD Gothic Neo"/>
               </a:rPr>
-              <a:t>활용 데이터와 데이터 공백 대응</a:t>
-            </a:r>
-          </a:p>
-        </p:txBody>
-      </p:sp>
-      <p:sp>
-        <p:nvSpPr>
-          <p:cNvPr id="3" name="TextBox 2"/>
+              <a:t>어떤 데이터를 썼나</a:t>
+            </a:r>
+          </a:p>
+        </p:txBody>
+      </p:sp>
+      <p:sp>
+        <p:nvSpPr>
+          <p:cNvPr id="4" name="Rectangle 3"/>
+          <p:cNvSpPr/>
+          <p:nvPr/>
+        </p:nvSpPr>
+        <p:spPr>
+          <a:xfrm>
+            <a:off x="548640" y="1463040"/>
+            <a:ext cx="3566160" cy="2377440"/>
+          </a:xfrm>
+          <a:prstGeom prst="rect">
+            <a:avLst/>
+          </a:prstGeom>
+          <a:solidFill>
+            <a:srgbClr val="F6F8FA"/>
+          </a:solidFill>
+          <a:ln w="9525">
+            <a:solidFill>
+              <a:srgbClr val="E2E6EA"/>
+            </a:solidFill>
+          </a:ln>
+          <a:effectLst/>
+        </p:spPr>
+        <p:style>
+          <a:lnRef idx="1">
+            <a:schemeClr val="accent1"/>
+          </a:lnRef>
+          <a:fillRef idx="3">
+            <a:schemeClr val="accent1"/>
+          </a:fillRef>
+          <a:effectRef idx="2">
+            <a:schemeClr val="accent1"/>
+          </a:effectRef>
+          <a:fontRef idx="minor">
+            <a:schemeClr val="lt1"/>
+          </a:fontRef>
+        </p:style>
+        <p:txBody>
+          <a:bodyPr rtlCol="0" anchor="ctr"/>
+          <a:lstStyle/>
+          <a:p>
+            <a:pPr algn="ctr"/>
+          </a:p>
+        </p:txBody>
+      </p:sp>
+      <p:sp>
+        <p:nvSpPr>
+          <p:cNvPr id="5" name="Rectangle 4"/>
+          <p:cNvSpPr/>
+          <p:nvPr/>
+        </p:nvSpPr>
+        <p:spPr>
+          <a:xfrm>
+            <a:off x="548640" y="1463040"/>
+            <a:ext cx="3566160" cy="64008"/>
+          </a:xfrm>
+          <a:prstGeom prst="rect">
+            <a:avLst/>
+          </a:prstGeom>
+          <a:solidFill>
+            <a:srgbClr val="0F9688"/>
+          </a:solidFill>
+          <a:ln>
+            <a:noFill/>
+          </a:ln>
+          <a:effectLst/>
+        </p:spPr>
+        <p:style>
+          <a:lnRef idx="1">
+            <a:schemeClr val="accent1"/>
+          </a:lnRef>
+          <a:fillRef idx="3">
+            <a:schemeClr val="accent1"/>
+          </a:fillRef>
+          <a:effectRef idx="2">
+            <a:schemeClr val="accent1"/>
+          </a:effectRef>
+          <a:fontRef idx="minor">
+            <a:schemeClr val="lt1"/>
+          </a:fontRef>
+        </p:style>
+        <p:txBody>
+          <a:bodyPr rtlCol="0" anchor="ctr"/>
+          <a:lstStyle/>
+          <a:p>
+            <a:pPr algn="ctr"/>
+          </a:p>
+        </p:txBody>
+      </p:sp>
+      <p:sp>
+        <p:nvSpPr>
+          <p:cNvPr id="6" name="TextBox 5"/>
           <p:cNvSpPr txBox="1"/>
           <p:nvPr/>
         </p:nvSpPr>
         <p:spPr>
           <a:xfrm>
-            <a:off x="548640" y="1280160"/>
-            <a:ext cx="11064240" cy="5120640"/>
+            <a:off x="777240" y="1737360"/>
+            <a:ext cx="3108960" cy="2011680"/>
           </a:xfrm>
           <a:prstGeom prst="rect">
             <a:avLst/>
@@ -3289,106 +3965,429 @@
           <a:noFill/>
         </p:spPr>
         <p:txBody>
-          <a:bodyPr wrap="square">
+          <a:bodyPr wrap="square" anchor="t">
             <a:spAutoFit/>
           </a:bodyPr>
           <a:lstStyle/>
           <a:p>
             <a:pPr>
               <a:spcAft>
-                <a:spcPts val="600"/>
+                <a:spcPts val="500"/>
               </a:spcAft>
             </a:pPr>
             <a:r>
-              <a:rPr sz="1700" b="0">
+              <a:rPr sz="1900" b="1">
+                <a:solidFill>
+                  <a:srgbClr val="141E2E"/>
+                </a:solidFill>
                 <a:latin typeface="Apple SD Gothic Neo"/>
               </a:rPr>
-              <a:t>• 외국인·총인구: 포항시 지역통계(KOSIS), 2025</a:t>
+              <a:t>외국인·인구</a:t>
             </a:r>
           </a:p>
           <a:p>
             <a:pPr>
               <a:spcAft>
-                <a:spcPts val="600"/>
+                <a:spcPts val="500"/>
               </a:spcAft>
             </a:pPr>
             <a:r>
-              <a:rPr sz="1700" b="0">
+              <a:rPr sz="1500" b="0">
+                <a:solidFill>
+                  <a:srgbClr val="555F6D"/>
+                </a:solidFill>
                 <a:latin typeface="Apple SD Gothic Neo"/>
               </a:rPr>
-              <a:t>• 행정동 경계·집계구 인구: 통계청 SGIS</a:t>
-            </a:r>
-          </a:p>
+              <a:t>포항시 지역통계(KOSIS) 2025년. 동 경계와 집계구 인구는 통계청 SGIS에서 받았습니다.</a:t>
+            </a:r>
+          </a:p>
+        </p:txBody>
+      </p:sp>
+      <p:sp>
+        <p:nvSpPr>
+          <p:cNvPr id="7" name="Rectangle 6"/>
+          <p:cNvSpPr/>
+          <p:nvPr/>
+        </p:nvSpPr>
+        <p:spPr>
+          <a:xfrm>
+            <a:off x="4315968" y="1463040"/>
+            <a:ext cx="3566160" cy="2377440"/>
+          </a:xfrm>
+          <a:prstGeom prst="rect">
+            <a:avLst/>
+          </a:prstGeom>
+          <a:solidFill>
+            <a:srgbClr val="F6F8FA"/>
+          </a:solidFill>
+          <a:ln w="9525">
+            <a:solidFill>
+              <a:srgbClr val="E2E6EA"/>
+            </a:solidFill>
+          </a:ln>
+          <a:effectLst/>
+        </p:spPr>
+        <p:style>
+          <a:lnRef idx="1">
+            <a:schemeClr val="accent1"/>
+          </a:lnRef>
+          <a:fillRef idx="3">
+            <a:schemeClr val="accent1"/>
+          </a:fillRef>
+          <a:effectRef idx="2">
+            <a:schemeClr val="accent1"/>
+          </a:effectRef>
+          <a:fontRef idx="minor">
+            <a:schemeClr val="lt1"/>
+          </a:fontRef>
+        </p:style>
+        <p:txBody>
+          <a:bodyPr rtlCol="0" anchor="ctr"/>
+          <a:lstStyle/>
+          <a:p>
+            <a:pPr algn="ctr"/>
+          </a:p>
+        </p:txBody>
+      </p:sp>
+      <p:sp>
+        <p:nvSpPr>
+          <p:cNvPr id="8" name="Rectangle 7"/>
+          <p:cNvSpPr/>
+          <p:nvPr/>
+        </p:nvSpPr>
+        <p:spPr>
+          <a:xfrm>
+            <a:off x="4315968" y="1463040"/>
+            <a:ext cx="3566160" cy="64008"/>
+          </a:xfrm>
+          <a:prstGeom prst="rect">
+            <a:avLst/>
+          </a:prstGeom>
+          <a:solidFill>
+            <a:srgbClr val="0F9688"/>
+          </a:solidFill>
+          <a:ln>
+            <a:noFill/>
+          </a:ln>
+          <a:effectLst/>
+        </p:spPr>
+        <p:style>
+          <a:lnRef idx="1">
+            <a:schemeClr val="accent1"/>
+          </a:lnRef>
+          <a:fillRef idx="3">
+            <a:schemeClr val="accent1"/>
+          </a:fillRef>
+          <a:effectRef idx="2">
+            <a:schemeClr val="accent1"/>
+          </a:effectRef>
+          <a:fontRef idx="minor">
+            <a:schemeClr val="lt1"/>
+          </a:fontRef>
+        </p:style>
+        <p:txBody>
+          <a:bodyPr rtlCol="0" anchor="ctr"/>
+          <a:lstStyle/>
+          <a:p>
+            <a:pPr algn="ctr"/>
+          </a:p>
+        </p:txBody>
+      </p:sp>
+      <p:sp>
+        <p:nvSpPr>
+          <p:cNvPr id="9" name="TextBox 8"/>
+          <p:cNvSpPr txBox="1"/>
+          <p:nvPr/>
+        </p:nvSpPr>
+        <p:spPr>
+          <a:xfrm>
+            <a:off x="4544568" y="1737360"/>
+            <a:ext cx="3108960" cy="2011680"/>
+          </a:xfrm>
+          <a:prstGeom prst="rect">
+            <a:avLst/>
+          </a:prstGeom>
+          <a:noFill/>
+        </p:spPr>
+        <p:txBody>
+          <a:bodyPr wrap="square" anchor="t">
+            <a:spAutoFit/>
+          </a:bodyPr>
+          <a:lstStyle/>
           <a:p>
             <a:pPr>
               <a:spcAft>
-                <a:spcPts val="600"/>
+                <a:spcPts val="500"/>
               </a:spcAft>
             </a:pPr>
             <a:r>
-              <a:rPr sz="1700" b="0">
+              <a:rPr sz="1900" b="1">
+                <a:solidFill>
+                  <a:srgbClr val="141E2E"/>
+                </a:solidFill>
                 <a:latin typeface="Apple SD Gothic Neo"/>
               </a:rPr>
-              <a:t>• 의료 공급: 심평원 병원·약국 (908건, 병원은 총의사수 반영)</a:t>
+              <a:t>병원·약국</a:t>
             </a:r>
           </a:p>
           <a:p>
             <a:pPr>
               <a:spcAft>
-                <a:spcPts val="600"/>
+                <a:spcPts val="500"/>
               </a:spcAft>
             </a:pPr>
             <a:r>
-              <a:rPr sz="1700" b="0">
+              <a:rPr sz="1500" b="0">
+                <a:solidFill>
+                  <a:srgbClr val="555F6D"/>
+                </a:solidFill>
                 <a:latin typeface="Apple SD Gothic Neo"/>
               </a:rPr>
-              <a:t>• 배경 근거: 경상북도 외국인주민 실태조사(2023, 포항 속한 1권역) + 여가부 전국다문화가족실태조사(2025)</a:t>
-            </a:r>
-          </a:p>
+              <a:t>심평원 자료 908곳. 병원은 의사 수까지 반영했습니다.</a:t>
+            </a:r>
+          </a:p>
+        </p:txBody>
+      </p:sp>
+      <p:sp>
+        <p:nvSpPr>
+          <p:cNvPr id="10" name="Rectangle 9"/>
+          <p:cNvSpPr/>
+          <p:nvPr/>
+        </p:nvSpPr>
+        <p:spPr>
+          <a:xfrm>
+            <a:off x="8074152" y="1463040"/>
+            <a:ext cx="3566160" cy="2377440"/>
+          </a:xfrm>
+          <a:prstGeom prst="rect">
+            <a:avLst/>
+          </a:prstGeom>
+          <a:solidFill>
+            <a:srgbClr val="F6F8FA"/>
+          </a:solidFill>
+          <a:ln w="9525">
+            <a:solidFill>
+              <a:srgbClr val="E2E6EA"/>
+            </a:solidFill>
+          </a:ln>
+          <a:effectLst/>
+        </p:spPr>
+        <p:style>
+          <a:lnRef idx="1">
+            <a:schemeClr val="accent1"/>
+          </a:lnRef>
+          <a:fillRef idx="3">
+            <a:schemeClr val="accent1"/>
+          </a:fillRef>
+          <a:effectRef idx="2">
+            <a:schemeClr val="accent1"/>
+          </a:effectRef>
+          <a:fontRef idx="minor">
+            <a:schemeClr val="lt1"/>
+          </a:fontRef>
+        </p:style>
+        <p:txBody>
+          <a:bodyPr rtlCol="0" anchor="ctr"/>
+          <a:lstStyle/>
+          <a:p>
+            <a:pPr algn="ctr"/>
+          </a:p>
+        </p:txBody>
+      </p:sp>
+      <p:sp>
+        <p:nvSpPr>
+          <p:cNvPr id="11" name="Rectangle 10"/>
+          <p:cNvSpPr/>
+          <p:nvPr/>
+        </p:nvSpPr>
+        <p:spPr>
+          <a:xfrm>
+            <a:off x="8074152" y="1463040"/>
+            <a:ext cx="3566160" cy="64008"/>
+          </a:xfrm>
+          <a:prstGeom prst="rect">
+            <a:avLst/>
+          </a:prstGeom>
+          <a:solidFill>
+            <a:srgbClr val="0F9688"/>
+          </a:solidFill>
+          <a:ln>
+            <a:noFill/>
+          </a:ln>
+          <a:effectLst/>
+        </p:spPr>
+        <p:style>
+          <a:lnRef idx="1">
+            <a:schemeClr val="accent1"/>
+          </a:lnRef>
+          <a:fillRef idx="3">
+            <a:schemeClr val="accent1"/>
+          </a:fillRef>
+          <a:effectRef idx="2">
+            <a:schemeClr val="accent1"/>
+          </a:effectRef>
+          <a:fontRef idx="minor">
+            <a:schemeClr val="lt1"/>
+          </a:fontRef>
+        </p:style>
+        <p:txBody>
+          <a:bodyPr rtlCol="0" anchor="ctr"/>
+          <a:lstStyle/>
+          <a:p>
+            <a:pPr algn="ctr"/>
+          </a:p>
+        </p:txBody>
+      </p:sp>
+      <p:sp>
+        <p:nvSpPr>
+          <p:cNvPr id="12" name="TextBox 11"/>
+          <p:cNvSpPr txBox="1"/>
+          <p:nvPr/>
+        </p:nvSpPr>
+        <p:spPr>
+          <a:xfrm>
+            <a:off x="8302752" y="1737360"/>
+            <a:ext cx="3108960" cy="2011680"/>
+          </a:xfrm>
+          <a:prstGeom prst="rect">
+            <a:avLst/>
+          </a:prstGeom>
+          <a:noFill/>
+        </p:spPr>
+        <p:txBody>
+          <a:bodyPr wrap="square" anchor="t">
+            <a:spAutoFit/>
+          </a:bodyPr>
+          <a:lstStyle/>
           <a:p>
             <a:pPr>
               <a:spcAft>
-                <a:spcPts val="600"/>
+                <a:spcPts val="500"/>
               </a:spcAft>
             </a:pPr>
+            <a:r>
+              <a:rPr sz="1900" b="1">
+                <a:solidFill>
+                  <a:srgbClr val="141E2E"/>
+                </a:solidFill>
+                <a:latin typeface="Apple SD Gothic Neo"/>
+              </a:rPr>
+              <a:t>배경 조사</a:t>
+            </a:r>
           </a:p>
           <a:p>
             <a:pPr>
               <a:spcAft>
-                <a:spcPts val="600"/>
+                <a:spcPts val="500"/>
               </a:spcAft>
             </a:pPr>
             <a:r>
-              <a:rPr sz="1700" b="0">
+              <a:rPr sz="1500" b="0">
+                <a:solidFill>
+                  <a:srgbClr val="555F6D"/>
+                </a:solidFill>
                 <a:latin typeface="Apple SD Gothic Neo"/>
               </a:rPr>
-              <a:t>데이터가 없을 때 멈추지 않고 한계를 밝히며 진행했습니다.</a:t>
-            </a:r>
-          </a:p>
+              <a:t>경북 외국인주민 실태조사(2023), 여가부 전국다문화가족실태조사(2025)의 공개 결과.</a:t>
+            </a:r>
+          </a:p>
+        </p:txBody>
+      </p:sp>
+      <p:sp>
+        <p:nvSpPr>
+          <p:cNvPr id="13" name="Rectangle 12"/>
+          <p:cNvSpPr/>
+          <p:nvPr/>
+        </p:nvSpPr>
+        <p:spPr>
+          <a:xfrm>
+            <a:off x="548640" y="4206240"/>
+            <a:ext cx="11091672" cy="1737360"/>
+          </a:xfrm>
+          <a:prstGeom prst="rect">
+            <a:avLst/>
+          </a:prstGeom>
+          <a:solidFill>
+            <a:srgbClr val="ECF8F5"/>
+          </a:solidFill>
+          <a:ln>
+            <a:noFill/>
+          </a:ln>
+          <a:effectLst/>
+        </p:spPr>
+        <p:style>
+          <a:lnRef idx="1">
+            <a:schemeClr val="accent1"/>
+          </a:lnRef>
+          <a:fillRef idx="3">
+            <a:schemeClr val="accent1"/>
+          </a:fillRef>
+          <a:effectRef idx="2">
+            <a:schemeClr val="accent1"/>
+          </a:effectRef>
+          <a:fontRef idx="minor">
+            <a:schemeClr val="lt1"/>
+          </a:fontRef>
+        </p:style>
+        <p:txBody>
+          <a:bodyPr rtlCol="0" anchor="ctr"/>
+          <a:lstStyle/>
+          <a:p>
+            <a:pPr algn="ctr"/>
+          </a:p>
+        </p:txBody>
+      </p:sp>
+      <p:sp>
+        <p:nvSpPr>
+          <p:cNvPr id="14" name="TextBox 13"/>
+          <p:cNvSpPr txBox="1"/>
+          <p:nvPr/>
+        </p:nvSpPr>
+        <p:spPr>
+          <a:xfrm>
+            <a:off x="822960" y="4343400"/>
+            <a:ext cx="10515600" cy="1554480"/>
+          </a:xfrm>
+          <a:prstGeom prst="rect">
+            <a:avLst/>
+          </a:prstGeom>
+          <a:noFill/>
+        </p:spPr>
+        <p:txBody>
+          <a:bodyPr wrap="square" anchor="t">
+            <a:spAutoFit/>
+          </a:bodyPr>
+          <a:lstStyle/>
           <a:p>
             <a:pPr>
               <a:spcAft>
-                <a:spcPts val="600"/>
+                <a:spcPts val="500"/>
               </a:spcAft>
             </a:pPr>
             <a:r>
-              <a:rPr sz="1700" b="0">
+              <a:rPr sz="1700" b="1">
+                <a:solidFill>
+                  <a:srgbClr val="0F9688"/>
+                </a:solidFill>
                 <a:latin typeface="Apple SD Gothic Neo"/>
               </a:rPr>
-              <a:t>  - 금융: 상가정보 API에 레코드 0건 → 의료 단일 지수로 확정</a:t>
+              <a:t>못 구한 데이터도 있었습니다</a:t>
             </a:r>
           </a:p>
           <a:p>
             <a:pPr>
               <a:spcAft>
-                <a:spcPts val="600"/>
+                <a:spcPts val="500"/>
               </a:spcAft>
             </a:pPr>
             <a:r>
-              <a:rPr sz="1700" b="0">
+              <a:rPr sz="1500" b="0">
+                <a:solidFill>
+                  <a:srgbClr val="141E2E"/>
+                </a:solidFill>
                 <a:latin typeface="Apple SD Gothic Neo"/>
               </a:rPr>
-              <a:t>  - 다문화가족실태조사 원자료: 유료 원격접근 → 공개 결과보고서로 대체 (행정동별 차등은 불가)</a:t>
+              <a:t>금융은 상가정보 API에 포항 데이터가 0건이라 빼고 의료만 봤습니다. 다문화가족실태조사 원자료는 유료라 공개 보고서로 바꿨습니다. 그래서 동마다 다른 체감 차이는 이번 분석에 들어 있지 않습니다.</a:t>
             </a:r>
           </a:p>
         </p:txBody>
@@ -3413,14 +4412,58 @@
       <p:grpSpPr/>
       <p:sp>
         <p:nvSpPr>
-          <p:cNvPr id="2" name="TextBox 1"/>
+          <p:cNvPr id="2" name="Rectangle 1"/>
+          <p:cNvSpPr/>
+          <p:nvPr/>
+        </p:nvSpPr>
+        <p:spPr>
+          <a:xfrm>
+            <a:off x="548640" y="411480"/>
+            <a:ext cx="73152" cy="548640"/>
+          </a:xfrm>
+          <a:prstGeom prst="rect">
+            <a:avLst/>
+          </a:prstGeom>
+          <a:solidFill>
+            <a:srgbClr val="0F9688"/>
+          </a:solidFill>
+          <a:ln>
+            <a:noFill/>
+          </a:ln>
+          <a:effectLst/>
+        </p:spPr>
+        <p:style>
+          <a:lnRef idx="1">
+            <a:schemeClr val="accent1"/>
+          </a:lnRef>
+          <a:fillRef idx="3">
+            <a:schemeClr val="accent1"/>
+          </a:fillRef>
+          <a:effectRef idx="2">
+            <a:schemeClr val="accent1"/>
+          </a:effectRef>
+          <a:fontRef idx="minor">
+            <a:schemeClr val="lt1"/>
+          </a:fontRef>
+        </p:style>
+        <p:txBody>
+          <a:bodyPr rtlCol="0" anchor="ctr"/>
+          <a:lstStyle/>
+          <a:p>
+            <a:pPr algn="ctr"/>
+          </a:p>
+        </p:txBody>
+      </p:sp>
+      <p:sp>
+        <p:nvSpPr>
+          <p:cNvPr id="3" name="TextBox 2"/>
           <p:cNvSpPr txBox="1"/>
           <p:nvPr/>
         </p:nvSpPr>
         <p:spPr>
           <a:xfrm>
-            <a:off x="548640" y="320040"/>
-            <a:ext cx="11064240" cy="822960"/>
+            <a:off x="777240" y="347472"/>
+            <a:ext cx="10515600" cy="731520"/>
           </a:xfrm>
           <a:prstGeom prst="rect">
             <a:avLst/>
@@ -3428,38 +4471,82 @@
           <a:noFill/>
         </p:spPr>
         <p:txBody>
-          <a:bodyPr wrap="square">
+          <a:bodyPr wrap="square" anchor="ctr">
             <a:spAutoFit/>
           </a:bodyPr>
           <a:lstStyle/>
           <a:p>
             <a:pPr>
               <a:spcAft>
-                <a:spcPts val="600"/>
+                <a:spcPts val="500"/>
               </a:spcAft>
             </a:pPr>
             <a:r>
               <a:rPr sz="2800" b="1">
                 <a:solidFill>
-                  <a:srgbClr val="1C5CAB"/>
+                  <a:srgbClr val="141E2E"/>
                 </a:solidFill>
                 <a:latin typeface="Apple SD Gothic Neo"/>
               </a:rPr>
-              <a:t>핵심 알고리즘: 격차 점수</a:t>
-            </a:r>
-          </a:p>
-        </p:txBody>
-      </p:sp>
-      <p:sp>
-        <p:nvSpPr>
-          <p:cNvPr id="3" name="TextBox 2"/>
+              <a:t>격차 점수는 이렇게 계산했습니다</a:t>
+            </a:r>
+          </a:p>
+        </p:txBody>
+      </p:sp>
+      <p:sp>
+        <p:nvSpPr>
+          <p:cNvPr id="4" name="Rectangle 3"/>
+          <p:cNvSpPr/>
+          <p:nvPr/>
+        </p:nvSpPr>
+        <p:spPr>
+          <a:xfrm>
+            <a:off x="548640" y="1463040"/>
+            <a:ext cx="11091672" cy="1371600"/>
+          </a:xfrm>
+          <a:prstGeom prst="rect">
+            <a:avLst/>
+          </a:prstGeom>
+          <a:solidFill>
+            <a:srgbClr val="ECF8F5"/>
+          </a:solidFill>
+          <a:ln>
+            <a:noFill/>
+          </a:ln>
+          <a:effectLst/>
+        </p:spPr>
+        <p:style>
+          <a:lnRef idx="1">
+            <a:schemeClr val="accent1"/>
+          </a:lnRef>
+          <a:fillRef idx="3">
+            <a:schemeClr val="accent1"/>
+          </a:fillRef>
+          <a:effectRef idx="2">
+            <a:schemeClr val="accent1"/>
+          </a:effectRef>
+          <a:fontRef idx="minor">
+            <a:schemeClr val="lt1"/>
+          </a:fontRef>
+        </p:style>
+        <p:txBody>
+          <a:bodyPr rtlCol="0" anchor="ctr"/>
+          <a:lstStyle/>
+          <a:p>
+            <a:pPr algn="ctr"/>
+          </a:p>
+        </p:txBody>
+      </p:sp>
+      <p:sp>
+        <p:nvSpPr>
+          <p:cNvPr id="5" name="TextBox 4"/>
           <p:cNvSpPr txBox="1"/>
           <p:nvPr/>
         </p:nvSpPr>
         <p:spPr>
           <a:xfrm>
-            <a:off x="548640" y="1280160"/>
-            <a:ext cx="11064240" cy="5120640"/>
+            <a:off x="548640" y="1463040"/>
+            <a:ext cx="11091672" cy="1371600"/>
           </a:xfrm>
           <a:prstGeom prst="rect">
             <a:avLst/>
@@ -3467,87 +4554,514 @@
           <a:noFill/>
         </p:spPr>
         <p:txBody>
-          <a:bodyPr wrap="square">
+          <a:bodyPr wrap="square" anchor="ctr">
             <a:spAutoFit/>
           </a:bodyPr>
           <a:lstStyle/>
           <a:p>
             <a:pPr>
               <a:spcAft>
-                <a:spcPts val="600"/>
+                <a:spcPts val="500"/>
               </a:spcAft>
             </a:pPr>
             <a:r>
-              <a:rPr sz="1800" b="0">
+              <a:rPr sz="2600" b="1">
+                <a:solidFill>
+                  <a:srgbClr val="141E2E"/>
+                </a:solidFill>
                 <a:latin typeface="Apple SD Gothic Neo"/>
               </a:rPr>
-              <a:t>gap_score = 0.5 × 정규화(외국인 비율) + 0.5 × (1 − 정규화(접근성))</a:t>
+              <a:t>격차 점수 = 0.5 × 외국인 비율 + 0.5 × (1 − 의료 접근성)</a:t>
             </a:r>
           </a:p>
           <a:p>
             <a:pPr>
               <a:spcAft>
-                <a:spcPts val="600"/>
+                <a:spcPts val="500"/>
               </a:spcAft>
             </a:pPr>
-          </a:p>
+            <a:r>
+              <a:rPr sz="1400" b="0">
+                <a:solidFill>
+                  <a:srgbClr val="555F6D"/>
+                </a:solidFill>
+                <a:latin typeface="Apple SD Gothic Neo"/>
+              </a:rPr>
+              <a:t>두 값 모두 0에서 1 사이로 맞춘 뒤 계산</a:t>
+            </a:r>
+          </a:p>
+        </p:txBody>
+      </p:sp>
+      <p:sp>
+        <p:nvSpPr>
+          <p:cNvPr id="6" name="Rectangle 5"/>
+          <p:cNvSpPr/>
+          <p:nvPr/>
+        </p:nvSpPr>
+        <p:spPr>
+          <a:xfrm>
+            <a:off x="548640" y="3108960"/>
+            <a:ext cx="3566160" cy="2011680"/>
+          </a:xfrm>
+          <a:prstGeom prst="rect">
+            <a:avLst/>
+          </a:prstGeom>
+          <a:solidFill>
+            <a:srgbClr val="F6F8FA"/>
+          </a:solidFill>
+          <a:ln w="9525">
+            <a:solidFill>
+              <a:srgbClr val="E2E6EA"/>
+            </a:solidFill>
+          </a:ln>
+          <a:effectLst/>
+        </p:spPr>
+        <p:style>
+          <a:lnRef idx="1">
+            <a:schemeClr val="accent1"/>
+          </a:lnRef>
+          <a:fillRef idx="3">
+            <a:schemeClr val="accent1"/>
+          </a:fillRef>
+          <a:effectRef idx="2">
+            <a:schemeClr val="accent1"/>
+          </a:effectRef>
+          <a:fontRef idx="minor">
+            <a:schemeClr val="lt1"/>
+          </a:fontRef>
+        </p:style>
+        <p:txBody>
+          <a:bodyPr rtlCol="0" anchor="ctr"/>
+          <a:lstStyle/>
+          <a:p>
+            <a:pPr algn="ctr"/>
+          </a:p>
+        </p:txBody>
+      </p:sp>
+      <p:sp>
+        <p:nvSpPr>
+          <p:cNvPr id="7" name="Rectangle 6"/>
+          <p:cNvSpPr/>
+          <p:nvPr/>
+        </p:nvSpPr>
+        <p:spPr>
+          <a:xfrm>
+            <a:off x="548640" y="3108960"/>
+            <a:ext cx="3566160" cy="64008"/>
+          </a:xfrm>
+          <a:prstGeom prst="rect">
+            <a:avLst/>
+          </a:prstGeom>
+          <a:solidFill>
+            <a:srgbClr val="0F9688"/>
+          </a:solidFill>
+          <a:ln>
+            <a:noFill/>
+          </a:ln>
+          <a:effectLst/>
+        </p:spPr>
+        <p:style>
+          <a:lnRef idx="1">
+            <a:schemeClr val="accent1"/>
+          </a:lnRef>
+          <a:fillRef idx="3">
+            <a:schemeClr val="accent1"/>
+          </a:fillRef>
+          <a:effectRef idx="2">
+            <a:schemeClr val="accent1"/>
+          </a:effectRef>
+          <a:fontRef idx="minor">
+            <a:schemeClr val="lt1"/>
+          </a:fontRef>
+        </p:style>
+        <p:txBody>
+          <a:bodyPr rtlCol="0" anchor="ctr"/>
+          <a:lstStyle/>
+          <a:p>
+            <a:pPr algn="ctr"/>
+          </a:p>
+        </p:txBody>
+      </p:sp>
+      <p:sp>
+        <p:nvSpPr>
+          <p:cNvPr id="8" name="TextBox 7"/>
+          <p:cNvSpPr txBox="1"/>
+          <p:nvPr/>
+        </p:nvSpPr>
+        <p:spPr>
+          <a:xfrm>
+            <a:off x="777240" y="3383279"/>
+            <a:ext cx="3108960" cy="1645920"/>
+          </a:xfrm>
+          <a:prstGeom prst="rect">
+            <a:avLst/>
+          </a:prstGeom>
+          <a:noFill/>
+        </p:spPr>
+        <p:txBody>
+          <a:bodyPr wrap="square" anchor="t">
+            <a:spAutoFit/>
+          </a:bodyPr>
+          <a:lstStyle/>
           <a:p>
             <a:pPr>
               <a:spcAft>
-                <a:spcPts val="600"/>
+                <a:spcPts val="500"/>
               </a:spcAft>
             </a:pPr>
             <a:r>
-              <a:rPr sz="1800" b="0">
+              <a:rPr sz="1900" b="1">
+                <a:solidFill>
+                  <a:srgbClr val="141E2E"/>
+                </a:solidFill>
                 <a:latin typeface="Apple SD Gothic Neo"/>
               </a:rPr>
-              <a:t>• 수요: 행정동 외국인 비율 (pop_foreign / pop_total)</a:t>
+              <a:t>외국인 비율</a:t>
             </a:r>
           </a:p>
           <a:p>
             <a:pPr>
               <a:spcAft>
-                <a:spcPts val="600"/>
+                <a:spcPts val="500"/>
               </a:spcAft>
             </a:pPr>
             <a:r>
-              <a:rPr sz="1800" b="0">
+              <a:rPr sz="1500" b="0">
+                <a:solidFill>
+                  <a:srgbClr val="555F6D"/>
+                </a:solidFill>
                 <a:latin typeface="Apple SD Gothic Neo"/>
               </a:rPr>
-              <a:t>• 접근성: 2SFCA 지수, 기본 임계거리 3km (1·5km도 함께 비교)</a:t>
-            </a:r>
-          </a:p>
+              <a:t>동 인구 중 외국인이 차지하는 비율입니다.</a:t>
+            </a:r>
+          </a:p>
+        </p:txBody>
+      </p:sp>
+      <p:sp>
+        <p:nvSpPr>
+          <p:cNvPr id="9" name="Rectangle 8"/>
+          <p:cNvSpPr/>
+          <p:nvPr/>
+        </p:nvSpPr>
+        <p:spPr>
+          <a:xfrm>
+            <a:off x="4315968" y="3108960"/>
+            <a:ext cx="3566160" cy="2011680"/>
+          </a:xfrm>
+          <a:prstGeom prst="rect">
+            <a:avLst/>
+          </a:prstGeom>
+          <a:solidFill>
+            <a:srgbClr val="F6F8FA"/>
+          </a:solidFill>
+          <a:ln w="9525">
+            <a:solidFill>
+              <a:srgbClr val="E2E6EA"/>
+            </a:solidFill>
+          </a:ln>
+          <a:effectLst/>
+        </p:spPr>
+        <p:style>
+          <a:lnRef idx="1">
+            <a:schemeClr val="accent1"/>
+          </a:lnRef>
+          <a:fillRef idx="3">
+            <a:schemeClr val="accent1"/>
+          </a:fillRef>
+          <a:effectRef idx="2">
+            <a:schemeClr val="accent1"/>
+          </a:effectRef>
+          <a:fontRef idx="minor">
+            <a:schemeClr val="lt1"/>
+          </a:fontRef>
+        </p:style>
+        <p:txBody>
+          <a:bodyPr rtlCol="0" anchor="ctr"/>
+          <a:lstStyle/>
+          <a:p>
+            <a:pPr algn="ctr"/>
+          </a:p>
+        </p:txBody>
+      </p:sp>
+      <p:sp>
+        <p:nvSpPr>
+          <p:cNvPr id="10" name="Rectangle 9"/>
+          <p:cNvSpPr/>
+          <p:nvPr/>
+        </p:nvSpPr>
+        <p:spPr>
+          <a:xfrm>
+            <a:off x="4315968" y="3108960"/>
+            <a:ext cx="3566160" cy="64008"/>
+          </a:xfrm>
+          <a:prstGeom prst="rect">
+            <a:avLst/>
+          </a:prstGeom>
+          <a:solidFill>
+            <a:srgbClr val="0F9688"/>
+          </a:solidFill>
+          <a:ln>
+            <a:noFill/>
+          </a:ln>
+          <a:effectLst/>
+        </p:spPr>
+        <p:style>
+          <a:lnRef idx="1">
+            <a:schemeClr val="accent1"/>
+          </a:lnRef>
+          <a:fillRef idx="3">
+            <a:schemeClr val="accent1"/>
+          </a:fillRef>
+          <a:effectRef idx="2">
+            <a:schemeClr val="accent1"/>
+          </a:effectRef>
+          <a:fontRef idx="minor">
+            <a:schemeClr val="lt1"/>
+          </a:fontRef>
+        </p:style>
+        <p:txBody>
+          <a:bodyPr rtlCol="0" anchor="ctr"/>
+          <a:lstStyle/>
+          <a:p>
+            <a:pPr algn="ctr"/>
+          </a:p>
+        </p:txBody>
+      </p:sp>
+      <p:sp>
+        <p:nvSpPr>
+          <p:cNvPr id="11" name="TextBox 10"/>
+          <p:cNvSpPr txBox="1"/>
+          <p:nvPr/>
+        </p:nvSpPr>
+        <p:spPr>
+          <a:xfrm>
+            <a:off x="4544568" y="3383279"/>
+            <a:ext cx="3108960" cy="1645920"/>
+          </a:xfrm>
+          <a:prstGeom prst="rect">
+            <a:avLst/>
+          </a:prstGeom>
+          <a:noFill/>
+        </p:spPr>
+        <p:txBody>
+          <a:bodyPr wrap="square" anchor="t">
+            <a:spAutoFit/>
+          </a:bodyPr>
+          <a:lstStyle/>
           <a:p>
             <a:pPr>
               <a:spcAft>
-                <a:spcPts val="600"/>
+                <a:spcPts val="500"/>
               </a:spcAft>
             </a:pPr>
             <a:r>
-              <a:rPr sz="1800" b="0">
+              <a:rPr sz="1900" b="1">
+                <a:solidFill>
+                  <a:srgbClr val="141E2E"/>
+                </a:solidFill>
                 <a:latin typeface="Apple SD Gothic Neo"/>
               </a:rPr>
-              <a:t>• 가중치 0.5/0.5: GM 검수를 거친 중립값</a:t>
+              <a:t>의료 접근성</a:t>
             </a:r>
           </a:p>
           <a:p>
             <a:pPr>
               <a:spcAft>
-                <a:spcPts val="600"/>
+                <a:spcPts val="500"/>
               </a:spcAft>
             </a:pPr>
-          </a:p>
+            <a:r>
+              <a:rPr sz="1500" b="0">
+                <a:solidFill>
+                  <a:srgbClr val="555F6D"/>
+                </a:solidFill>
+                <a:latin typeface="Apple SD Gothic Neo"/>
+              </a:rPr>
+              <a:t>2SFCA 지수입니다. 기준 거리는 3km로 하고, 1km와 5km로도 돌려봤습니다.</a:t>
+            </a:r>
+          </a:p>
+        </p:txBody>
+      </p:sp>
+      <p:sp>
+        <p:nvSpPr>
+          <p:cNvPr id="12" name="Rectangle 11"/>
+          <p:cNvSpPr/>
+          <p:nvPr/>
+        </p:nvSpPr>
+        <p:spPr>
+          <a:xfrm>
+            <a:off x="8074152" y="3108960"/>
+            <a:ext cx="3566160" cy="2011680"/>
+          </a:xfrm>
+          <a:prstGeom prst="rect">
+            <a:avLst/>
+          </a:prstGeom>
+          <a:solidFill>
+            <a:srgbClr val="F6F8FA"/>
+          </a:solidFill>
+          <a:ln w="9525">
+            <a:solidFill>
+              <a:srgbClr val="E2E6EA"/>
+            </a:solidFill>
+          </a:ln>
+          <a:effectLst/>
+        </p:spPr>
+        <p:style>
+          <a:lnRef idx="1">
+            <a:schemeClr val="accent1"/>
+          </a:lnRef>
+          <a:fillRef idx="3">
+            <a:schemeClr val="accent1"/>
+          </a:fillRef>
+          <a:effectRef idx="2">
+            <a:schemeClr val="accent1"/>
+          </a:effectRef>
+          <a:fontRef idx="minor">
+            <a:schemeClr val="lt1"/>
+          </a:fontRef>
+        </p:style>
+        <p:txBody>
+          <a:bodyPr rtlCol="0" anchor="ctr"/>
+          <a:lstStyle/>
+          <a:p>
+            <a:pPr algn="ctr"/>
+          </a:p>
+        </p:txBody>
+      </p:sp>
+      <p:sp>
+        <p:nvSpPr>
+          <p:cNvPr id="13" name="Rectangle 12"/>
+          <p:cNvSpPr/>
+          <p:nvPr/>
+        </p:nvSpPr>
+        <p:spPr>
+          <a:xfrm>
+            <a:off x="8074152" y="3108960"/>
+            <a:ext cx="3566160" cy="64008"/>
+          </a:xfrm>
+          <a:prstGeom prst="rect">
+            <a:avLst/>
+          </a:prstGeom>
+          <a:solidFill>
+            <a:srgbClr val="0F9688"/>
+          </a:solidFill>
+          <a:ln>
+            <a:noFill/>
+          </a:ln>
+          <a:effectLst/>
+        </p:spPr>
+        <p:style>
+          <a:lnRef idx="1">
+            <a:schemeClr val="accent1"/>
+          </a:lnRef>
+          <a:fillRef idx="3">
+            <a:schemeClr val="accent1"/>
+          </a:fillRef>
+          <a:effectRef idx="2">
+            <a:schemeClr val="accent1"/>
+          </a:effectRef>
+          <a:fontRef idx="minor">
+            <a:schemeClr val="lt1"/>
+          </a:fontRef>
+        </p:style>
+        <p:txBody>
+          <a:bodyPr rtlCol="0" anchor="ctr"/>
+          <a:lstStyle/>
+          <a:p>
+            <a:pPr algn="ctr"/>
+          </a:p>
+        </p:txBody>
+      </p:sp>
+      <p:sp>
+        <p:nvSpPr>
+          <p:cNvPr id="14" name="TextBox 13"/>
+          <p:cNvSpPr txBox="1"/>
+          <p:nvPr/>
+        </p:nvSpPr>
+        <p:spPr>
+          <a:xfrm>
+            <a:off x="8302752" y="3383279"/>
+            <a:ext cx="3108960" cy="1645920"/>
+          </a:xfrm>
+          <a:prstGeom prst="rect">
+            <a:avLst/>
+          </a:prstGeom>
+          <a:noFill/>
+        </p:spPr>
+        <p:txBody>
+          <a:bodyPr wrap="square" anchor="t">
+            <a:spAutoFit/>
+          </a:bodyPr>
+          <a:lstStyle/>
           <a:p>
             <a:pPr>
               <a:spcAft>
-                <a:spcPts val="600"/>
+                <a:spcPts val="500"/>
               </a:spcAft>
             </a:pPr>
             <a:r>
-              <a:rPr sz="1800" b="0">
+              <a:rPr sz="1900" b="1">
+                <a:solidFill>
+                  <a:srgbClr val="141E2E"/>
+                </a:solidFill>
                 <a:latin typeface="Apple SD Gothic Neo"/>
               </a:rPr>
-              <a:t>결과: 구룡포읍, 장기면, 호미곶면, 대송면 네 곳은 임계거리를 1·3·5km로 바꿔도 항상 상위 5위 안에 남습니다.</a:t>
+              <a:t>가중치 0.5 : 0.5</a:t>
+            </a:r>
+          </a:p>
+          <a:p>
+            <a:pPr>
+              <a:spcAft>
+                <a:spcPts val="500"/>
+              </a:spcAft>
+            </a:pPr>
+            <a:r>
+              <a:rPr sz="1500" b="0">
+                <a:solidFill>
+                  <a:srgbClr val="555F6D"/>
+                </a:solidFill>
+                <a:latin typeface="Apple SD Gothic Neo"/>
+              </a:rPr>
+              <a:t>한쪽에 무게를 둘 근거가 없어서 같게 뒀고, GM 검수를 받았습니다.</a:t>
+            </a:r>
+          </a:p>
+        </p:txBody>
+      </p:sp>
+      <p:sp>
+        <p:nvSpPr>
+          <p:cNvPr id="15" name="TextBox 14"/>
+          <p:cNvSpPr txBox="1"/>
+          <p:nvPr/>
+        </p:nvSpPr>
+        <p:spPr>
+          <a:xfrm>
+            <a:off x="548640" y="5440680"/>
+            <a:ext cx="11064240" cy="822960"/>
+          </a:xfrm>
+          <a:prstGeom prst="rect">
+            <a:avLst/>
+          </a:prstGeom>
+          <a:noFill/>
+        </p:spPr>
+        <p:txBody>
+          <a:bodyPr wrap="square" anchor="t">
+            <a:spAutoFit/>
+          </a:bodyPr>
+          <a:lstStyle/>
+          <a:p>
+            <a:pPr>
+              <a:spcAft>
+                <a:spcPts val="500"/>
+              </a:spcAft>
+            </a:pPr>
+            <a:r>
+              <a:rPr sz="1800" b="1">
+                <a:solidFill>
+                  <a:srgbClr val="0F9688"/>
+                </a:solidFill>
+                <a:latin typeface="Apple SD Gothic Neo"/>
+              </a:rPr>
+              <a:t>기준 거리를 1·3·5km로 바꿔도 구룡포읍, 장기면, 호미곶면, 대송면은 늘 5위 안에 들었습니다.</a:t>
             </a:r>
           </a:p>
         </p:txBody>
@@ -3572,14 +5086,58 @@
       <p:grpSpPr/>
       <p:sp>
         <p:nvSpPr>
-          <p:cNvPr id="2" name="TextBox 1"/>
+          <p:cNvPr id="2" name="Rectangle 1"/>
+          <p:cNvSpPr/>
+          <p:nvPr/>
+        </p:nvSpPr>
+        <p:spPr>
+          <a:xfrm>
+            <a:off x="548640" y="411480"/>
+            <a:ext cx="73152" cy="548640"/>
+          </a:xfrm>
+          <a:prstGeom prst="rect">
+            <a:avLst/>
+          </a:prstGeom>
+          <a:solidFill>
+            <a:srgbClr val="0F9688"/>
+          </a:solidFill>
+          <a:ln>
+            <a:noFill/>
+          </a:ln>
+          <a:effectLst/>
+        </p:spPr>
+        <p:style>
+          <a:lnRef idx="1">
+            <a:schemeClr val="accent1"/>
+          </a:lnRef>
+          <a:fillRef idx="3">
+            <a:schemeClr val="accent1"/>
+          </a:fillRef>
+          <a:effectRef idx="2">
+            <a:schemeClr val="accent1"/>
+          </a:effectRef>
+          <a:fontRef idx="minor">
+            <a:schemeClr val="lt1"/>
+          </a:fontRef>
+        </p:style>
+        <p:txBody>
+          <a:bodyPr rtlCol="0" anchor="ctr"/>
+          <a:lstStyle/>
+          <a:p>
+            <a:pPr algn="ctr"/>
+          </a:p>
+        </p:txBody>
+      </p:sp>
+      <p:sp>
+        <p:nvSpPr>
+          <p:cNvPr id="3" name="TextBox 2"/>
           <p:cNvSpPr txBox="1"/>
           <p:nvPr/>
         </p:nvSpPr>
         <p:spPr>
           <a:xfrm>
-            <a:off x="548640" y="320040"/>
-            <a:ext cx="11064240" cy="822960"/>
+            <a:off x="777240" y="347472"/>
+            <a:ext cx="10515600" cy="731520"/>
           </a:xfrm>
           <a:prstGeom prst="rect">
             <a:avLst/>
@@ -3587,38 +5145,128 @@
           <a:noFill/>
         </p:spPr>
         <p:txBody>
-          <a:bodyPr wrap="square">
+          <a:bodyPr wrap="square" anchor="ctr">
             <a:spAutoFit/>
           </a:bodyPr>
           <a:lstStyle/>
           <a:p>
             <a:pPr>
               <a:spcAft>
-                <a:spcPts val="600"/>
+                <a:spcPts val="500"/>
               </a:spcAft>
             </a:pPr>
             <a:r>
               <a:rPr sz="2800" b="1">
                 <a:solidFill>
-                  <a:srgbClr val="1C5CAB"/>
+                  <a:srgbClr val="141E2E"/>
                 </a:solidFill>
                 <a:latin typeface="Apple SD Gothic Neo"/>
               </a:rPr>
-              <a:t>LLM 정책 카드: 근거를 지키게 하는 가드레일</a:t>
-            </a:r>
-          </a:p>
-        </p:txBody>
-      </p:sp>
-      <p:sp>
-        <p:nvSpPr>
-          <p:cNvPr id="3" name="TextBox 2"/>
+              <a:t>정책 카드는 이렇게 걸러냈습니다</a:t>
+            </a:r>
+          </a:p>
+        </p:txBody>
+      </p:sp>
+      <p:sp>
+        <p:nvSpPr>
+          <p:cNvPr id="4" name="Rectangle 3"/>
+          <p:cNvSpPr/>
+          <p:nvPr/>
+        </p:nvSpPr>
+        <p:spPr>
+          <a:xfrm>
+            <a:off x="548640" y="1463040"/>
+            <a:ext cx="3566160" cy="3017520"/>
+          </a:xfrm>
+          <a:prstGeom prst="rect">
+            <a:avLst/>
+          </a:prstGeom>
+          <a:solidFill>
+            <a:srgbClr val="F6F8FA"/>
+          </a:solidFill>
+          <a:ln w="9525">
+            <a:solidFill>
+              <a:srgbClr val="E2E6EA"/>
+            </a:solidFill>
+          </a:ln>
+          <a:effectLst/>
+        </p:spPr>
+        <p:style>
+          <a:lnRef idx="1">
+            <a:schemeClr val="accent1"/>
+          </a:lnRef>
+          <a:fillRef idx="3">
+            <a:schemeClr val="accent1"/>
+          </a:fillRef>
+          <a:effectRef idx="2">
+            <a:schemeClr val="accent1"/>
+          </a:effectRef>
+          <a:fontRef idx="minor">
+            <a:schemeClr val="lt1"/>
+          </a:fontRef>
+        </p:style>
+        <p:txBody>
+          <a:bodyPr rtlCol="0" anchor="ctr"/>
+          <a:lstStyle/>
+          <a:p>
+            <a:pPr algn="ctr"/>
+          </a:p>
+        </p:txBody>
+      </p:sp>
+      <p:sp>
+        <p:nvSpPr>
+          <p:cNvPr id="5" name="Rectangle 4"/>
+          <p:cNvSpPr/>
+          <p:nvPr/>
+        </p:nvSpPr>
+        <p:spPr>
+          <a:xfrm>
+            <a:off x="548640" y="1463040"/>
+            <a:ext cx="3566160" cy="64008"/>
+          </a:xfrm>
+          <a:prstGeom prst="rect">
+            <a:avLst/>
+          </a:prstGeom>
+          <a:solidFill>
+            <a:srgbClr val="0F9688"/>
+          </a:solidFill>
+          <a:ln>
+            <a:noFill/>
+          </a:ln>
+          <a:effectLst/>
+        </p:spPr>
+        <p:style>
+          <a:lnRef idx="1">
+            <a:schemeClr val="accent1"/>
+          </a:lnRef>
+          <a:fillRef idx="3">
+            <a:schemeClr val="accent1"/>
+          </a:fillRef>
+          <a:effectRef idx="2">
+            <a:schemeClr val="accent1"/>
+          </a:effectRef>
+          <a:fontRef idx="minor">
+            <a:schemeClr val="lt1"/>
+          </a:fontRef>
+        </p:style>
+        <p:txBody>
+          <a:bodyPr rtlCol="0" anchor="ctr"/>
+          <a:lstStyle/>
+          <a:p>
+            <a:pPr algn="ctr"/>
+          </a:p>
+        </p:txBody>
+      </p:sp>
+      <p:sp>
+        <p:nvSpPr>
+          <p:cNvPr id="6" name="TextBox 5"/>
           <p:cNvSpPr txBox="1"/>
           <p:nvPr/>
         </p:nvSpPr>
         <p:spPr>
           <a:xfrm>
-            <a:off x="548640" y="1280160"/>
-            <a:ext cx="11064240" cy="5120640"/>
+            <a:off x="777240" y="1737360"/>
+            <a:ext cx="3108960" cy="2651760"/>
           </a:xfrm>
           <a:prstGeom prst="rect">
             <a:avLst/>
@@ -3626,60 +5274,413 @@
           <a:noFill/>
         </p:spPr>
         <p:txBody>
-          <a:bodyPr wrap="square">
+          <a:bodyPr wrap="square" anchor="t">
             <a:spAutoFit/>
           </a:bodyPr>
           <a:lstStyle/>
           <a:p>
             <a:pPr>
               <a:spcAft>
-                <a:spcPts val="600"/>
+                <a:spcPts val="500"/>
               </a:spcAft>
             </a:pPr>
             <a:r>
-              <a:rPr sz="1700" b="0">
+              <a:rPr sz="1900" b="1">
+                <a:solidFill>
+                  <a:srgbClr val="141E2E"/>
+                </a:solidFill>
                 <a:latin typeface="Apple SD Gothic Neo"/>
               </a:rPr>
-              <a:t>1. 입력: 격차 점수·순위 + 행정동 사실 + 조사 수치 (조사 수치와 행정동 사실을 구분해 인용)</a:t>
+              <a:t>넣는 것</a:t>
             </a:r>
           </a:p>
           <a:p>
             <a:pPr>
               <a:spcAft>
-                <a:spcPts val="600"/>
+                <a:spcPts val="500"/>
               </a:spcAft>
             </a:pPr>
             <a:r>
-              <a:rPr sz="1700" b="0">
+              <a:rPr sz="1400" b="0">
+                <a:solidFill>
+                  <a:srgbClr val="555F6D"/>
+                </a:solidFill>
                 <a:latin typeface="Apple SD Gothic Neo"/>
               </a:rPr>
-              <a:t>2. 출력 검사: 추론 과정 누출, 한자·외국어 혼입, 미완성 응답, 프롬프트에 없는 수치, '처방전 없이 약 제공' 같은 부적절 제안 → 자동 재생성</a:t>
-            </a:r>
-          </a:p>
+              <a:t>격차 점수, 동별 사실(외국인 수, 읍·면·동 구분), 조사 수치. 조사 수치와 동 사실은 구분해서 인용하게 했습니다.</a:t>
+            </a:r>
+          </a:p>
+        </p:txBody>
+      </p:sp>
+      <p:sp>
+        <p:nvSpPr>
+          <p:cNvPr id="7" name="Rectangle 6"/>
+          <p:cNvSpPr/>
+          <p:nvPr/>
+        </p:nvSpPr>
+        <p:spPr>
+          <a:xfrm>
+            <a:off x="4315968" y="1463040"/>
+            <a:ext cx="3566160" cy="3017520"/>
+          </a:xfrm>
+          <a:prstGeom prst="rect">
+            <a:avLst/>
+          </a:prstGeom>
+          <a:solidFill>
+            <a:srgbClr val="F6F8FA"/>
+          </a:solidFill>
+          <a:ln w="9525">
+            <a:solidFill>
+              <a:srgbClr val="E2E6EA"/>
+            </a:solidFill>
+          </a:ln>
+          <a:effectLst/>
+        </p:spPr>
+        <p:style>
+          <a:lnRef idx="1">
+            <a:schemeClr val="accent1"/>
+          </a:lnRef>
+          <a:fillRef idx="3">
+            <a:schemeClr val="accent1"/>
+          </a:fillRef>
+          <a:effectRef idx="2">
+            <a:schemeClr val="accent1"/>
+          </a:effectRef>
+          <a:fontRef idx="minor">
+            <a:schemeClr val="lt1"/>
+          </a:fontRef>
+        </p:style>
+        <p:txBody>
+          <a:bodyPr rtlCol="0" anchor="ctr"/>
+          <a:lstStyle/>
+          <a:p>
+            <a:pPr algn="ctr"/>
+          </a:p>
+        </p:txBody>
+      </p:sp>
+      <p:sp>
+        <p:nvSpPr>
+          <p:cNvPr id="8" name="Rectangle 7"/>
+          <p:cNvSpPr/>
+          <p:nvPr/>
+        </p:nvSpPr>
+        <p:spPr>
+          <a:xfrm>
+            <a:off x="4315968" y="1463040"/>
+            <a:ext cx="3566160" cy="64008"/>
+          </a:xfrm>
+          <a:prstGeom prst="rect">
+            <a:avLst/>
+          </a:prstGeom>
+          <a:solidFill>
+            <a:srgbClr val="0F9688"/>
+          </a:solidFill>
+          <a:ln>
+            <a:noFill/>
+          </a:ln>
+          <a:effectLst/>
+        </p:spPr>
+        <p:style>
+          <a:lnRef idx="1">
+            <a:schemeClr val="accent1"/>
+          </a:lnRef>
+          <a:fillRef idx="3">
+            <a:schemeClr val="accent1"/>
+          </a:fillRef>
+          <a:effectRef idx="2">
+            <a:schemeClr val="accent1"/>
+          </a:effectRef>
+          <a:fontRef idx="minor">
+            <a:schemeClr val="lt1"/>
+          </a:fontRef>
+        </p:style>
+        <p:txBody>
+          <a:bodyPr rtlCol="0" anchor="ctr"/>
+          <a:lstStyle/>
+          <a:p>
+            <a:pPr algn="ctr"/>
+          </a:p>
+        </p:txBody>
+      </p:sp>
+      <p:sp>
+        <p:nvSpPr>
+          <p:cNvPr id="9" name="TextBox 8"/>
+          <p:cNvSpPr txBox="1"/>
+          <p:nvPr/>
+        </p:nvSpPr>
+        <p:spPr>
+          <a:xfrm>
+            <a:off x="4544568" y="1737360"/>
+            <a:ext cx="3108960" cy="2651760"/>
+          </a:xfrm>
+          <a:prstGeom prst="rect">
+            <a:avLst/>
+          </a:prstGeom>
+          <a:noFill/>
+        </p:spPr>
+        <p:txBody>
+          <a:bodyPr wrap="square" anchor="t">
+            <a:spAutoFit/>
+          </a:bodyPr>
+          <a:lstStyle/>
           <a:p>
             <a:pPr>
               <a:spcAft>
-                <a:spcPts val="600"/>
+                <a:spcPts val="500"/>
               </a:spcAft>
             </a:pPr>
             <a:r>
-              <a:rPr sz="1700" b="0">
+              <a:rPr sz="1900" b="1">
+                <a:solidFill>
+                  <a:srgbClr val="141E2E"/>
+                </a:solidFill>
                 <a:latin typeface="Apple SD Gothic Neo"/>
               </a:rPr>
-              <a:t>3. 실제 발견: 가드레일 없이는 29건이 거의 같은 처방으로 수렴했고, 약사법에 어긋나는 제안도 나왔습니다.</a:t>
+              <a:t>거르는 것</a:t>
             </a:r>
           </a:p>
           <a:p>
             <a:pPr>
               <a:spcAft>
-                <a:spcPts val="600"/>
+                <a:spcPts val="500"/>
               </a:spcAft>
             </a:pPr>
             <a:r>
-              <a:rPr sz="1700" b="0">
+              <a:rPr sz="1400" b="0">
+                <a:solidFill>
+                  <a:srgbClr val="555F6D"/>
+                </a:solidFill>
                 <a:latin typeface="Apple SD Gothic Neo"/>
               </a:rPr>
-              <a:t>4. 한계: 형식·수치만 검증합니다. 정책의 타당성은 사람(GM)이 검수합니다.</a:t>
+              <a:t>추론 과정이 새어 나온 글, 한자·외국어가 섞인 글, 중간에 잘린 글, 입력에 없는 숫자, '처방전 없이 약 제공' 같은 제안은 다시 쓰게 했습니다.</a:t>
+            </a:r>
+          </a:p>
+        </p:txBody>
+      </p:sp>
+      <p:sp>
+        <p:nvSpPr>
+          <p:cNvPr id="10" name="Rectangle 9"/>
+          <p:cNvSpPr/>
+          <p:nvPr/>
+        </p:nvSpPr>
+        <p:spPr>
+          <a:xfrm>
+            <a:off x="8074152" y="1463040"/>
+            <a:ext cx="3566160" cy="3017520"/>
+          </a:xfrm>
+          <a:prstGeom prst="rect">
+            <a:avLst/>
+          </a:prstGeom>
+          <a:solidFill>
+            <a:srgbClr val="F6F8FA"/>
+          </a:solidFill>
+          <a:ln w="9525">
+            <a:solidFill>
+              <a:srgbClr val="E2E6EA"/>
+            </a:solidFill>
+          </a:ln>
+          <a:effectLst/>
+        </p:spPr>
+        <p:style>
+          <a:lnRef idx="1">
+            <a:schemeClr val="accent1"/>
+          </a:lnRef>
+          <a:fillRef idx="3">
+            <a:schemeClr val="accent1"/>
+          </a:fillRef>
+          <a:effectRef idx="2">
+            <a:schemeClr val="accent1"/>
+          </a:effectRef>
+          <a:fontRef idx="minor">
+            <a:schemeClr val="lt1"/>
+          </a:fontRef>
+        </p:style>
+        <p:txBody>
+          <a:bodyPr rtlCol="0" anchor="ctr"/>
+          <a:lstStyle/>
+          <a:p>
+            <a:pPr algn="ctr"/>
+          </a:p>
+        </p:txBody>
+      </p:sp>
+      <p:sp>
+        <p:nvSpPr>
+          <p:cNvPr id="11" name="Rectangle 10"/>
+          <p:cNvSpPr/>
+          <p:nvPr/>
+        </p:nvSpPr>
+        <p:spPr>
+          <a:xfrm>
+            <a:off x="8074152" y="1463040"/>
+            <a:ext cx="3566160" cy="64008"/>
+          </a:xfrm>
+          <a:prstGeom prst="rect">
+            <a:avLst/>
+          </a:prstGeom>
+          <a:solidFill>
+            <a:srgbClr val="0F9688"/>
+          </a:solidFill>
+          <a:ln>
+            <a:noFill/>
+          </a:ln>
+          <a:effectLst/>
+        </p:spPr>
+        <p:style>
+          <a:lnRef idx="1">
+            <a:schemeClr val="accent1"/>
+          </a:lnRef>
+          <a:fillRef idx="3">
+            <a:schemeClr val="accent1"/>
+          </a:fillRef>
+          <a:effectRef idx="2">
+            <a:schemeClr val="accent1"/>
+          </a:effectRef>
+          <a:fontRef idx="minor">
+            <a:schemeClr val="lt1"/>
+          </a:fontRef>
+        </p:style>
+        <p:txBody>
+          <a:bodyPr rtlCol="0" anchor="ctr"/>
+          <a:lstStyle/>
+          <a:p>
+            <a:pPr algn="ctr"/>
+          </a:p>
+        </p:txBody>
+      </p:sp>
+      <p:sp>
+        <p:nvSpPr>
+          <p:cNvPr id="12" name="TextBox 11"/>
+          <p:cNvSpPr txBox="1"/>
+          <p:nvPr/>
+        </p:nvSpPr>
+        <p:spPr>
+          <a:xfrm>
+            <a:off x="8302752" y="1737360"/>
+            <a:ext cx="3108960" cy="2651760"/>
+          </a:xfrm>
+          <a:prstGeom prst="rect">
+            <a:avLst/>
+          </a:prstGeom>
+          <a:noFill/>
+        </p:spPr>
+        <p:txBody>
+          <a:bodyPr wrap="square" anchor="t">
+            <a:spAutoFit/>
+          </a:bodyPr>
+          <a:lstStyle/>
+          <a:p>
+            <a:pPr>
+              <a:spcAft>
+                <a:spcPts val="500"/>
+              </a:spcAft>
+            </a:pPr>
+            <a:r>
+              <a:rPr sz="1900" b="1">
+                <a:solidFill>
+                  <a:srgbClr val="141E2E"/>
+                </a:solidFill>
+                <a:latin typeface="Apple SD Gothic Neo"/>
+              </a:rPr>
+              <a:t>사람이 보는 것</a:t>
+            </a:r>
+          </a:p>
+          <a:p>
+            <a:pPr>
+              <a:spcAft>
+                <a:spcPts val="500"/>
+              </a:spcAft>
+            </a:pPr>
+            <a:r>
+              <a:rPr sz="1400" b="0">
+                <a:solidFill>
+                  <a:srgbClr val="555F6D"/>
+                </a:solidFill>
+                <a:latin typeface="Apple SD Gothic Neo"/>
+              </a:rPr>
+              <a:t>코드는 형식과 숫자만 확인합니다. 정책이 실제로 타당한지는 GM이 검수합니다.</a:t>
+            </a:r>
+          </a:p>
+        </p:txBody>
+      </p:sp>
+      <p:sp>
+        <p:nvSpPr>
+          <p:cNvPr id="13" name="Rectangle 12"/>
+          <p:cNvSpPr/>
+          <p:nvPr/>
+        </p:nvSpPr>
+        <p:spPr>
+          <a:xfrm>
+            <a:off x="548640" y="4846320"/>
+            <a:ext cx="11091672" cy="1188720"/>
+          </a:xfrm>
+          <a:prstGeom prst="rect">
+            <a:avLst/>
+          </a:prstGeom>
+          <a:solidFill>
+            <a:srgbClr val="ECF8F5"/>
+          </a:solidFill>
+          <a:ln>
+            <a:noFill/>
+          </a:ln>
+          <a:effectLst/>
+        </p:spPr>
+        <p:style>
+          <a:lnRef idx="1">
+            <a:schemeClr val="accent1"/>
+          </a:lnRef>
+          <a:fillRef idx="3">
+            <a:schemeClr val="accent1"/>
+          </a:fillRef>
+          <a:effectRef idx="2">
+            <a:schemeClr val="accent1"/>
+          </a:effectRef>
+          <a:fontRef idx="minor">
+            <a:schemeClr val="lt1"/>
+          </a:fontRef>
+        </p:style>
+        <p:txBody>
+          <a:bodyPr rtlCol="0" anchor="ctr"/>
+          <a:lstStyle/>
+          <a:p>
+            <a:pPr algn="ctr"/>
+          </a:p>
+        </p:txBody>
+      </p:sp>
+      <p:sp>
+        <p:nvSpPr>
+          <p:cNvPr id="14" name="TextBox 13"/>
+          <p:cNvSpPr txBox="1"/>
+          <p:nvPr/>
+        </p:nvSpPr>
+        <p:spPr>
+          <a:xfrm>
+            <a:off x="822960" y="4846320"/>
+            <a:ext cx="10515600" cy="1188720"/>
+          </a:xfrm>
+          <a:prstGeom prst="rect">
+            <a:avLst/>
+          </a:prstGeom>
+          <a:noFill/>
+        </p:spPr>
+        <p:txBody>
+          <a:bodyPr wrap="square" anchor="ctr">
+            <a:spAutoFit/>
+          </a:bodyPr>
+          <a:lstStyle/>
+          <a:p>
+            <a:pPr>
+              <a:spcAft>
+                <a:spcPts val="500"/>
+              </a:spcAft>
+            </a:pPr>
+            <a:r>
+              <a:rPr sz="1600" b="1">
+                <a:solidFill>
+                  <a:srgbClr val="141E2E"/>
+                </a:solidFill>
+                <a:latin typeface="Apple SD Gothic Neo"/>
+              </a:rPr>
+              <a:t>처음엔 거르는 장치 없이 돌렸는데, 29건이 거의 같은 처방으로 나왔고 약사법에 맞지 않는 제안도 있었습니다.</a:t>
             </a:r>
           </a:p>
         </p:txBody>
@@ -3704,14 +5705,58 @@
       <p:grpSpPr/>
       <p:sp>
         <p:nvSpPr>
-          <p:cNvPr id="2" name="TextBox 1"/>
+          <p:cNvPr id="2" name="Rectangle 1"/>
+          <p:cNvSpPr/>
+          <p:nvPr/>
+        </p:nvSpPr>
+        <p:spPr>
+          <a:xfrm>
+            <a:off x="548640" y="411480"/>
+            <a:ext cx="73152" cy="548640"/>
+          </a:xfrm>
+          <a:prstGeom prst="rect">
+            <a:avLst/>
+          </a:prstGeom>
+          <a:solidFill>
+            <a:srgbClr val="0F9688"/>
+          </a:solidFill>
+          <a:ln>
+            <a:noFill/>
+          </a:ln>
+          <a:effectLst/>
+        </p:spPr>
+        <p:style>
+          <a:lnRef idx="1">
+            <a:schemeClr val="accent1"/>
+          </a:lnRef>
+          <a:fillRef idx="3">
+            <a:schemeClr val="accent1"/>
+          </a:fillRef>
+          <a:effectRef idx="2">
+            <a:schemeClr val="accent1"/>
+          </a:effectRef>
+          <a:fontRef idx="minor">
+            <a:schemeClr val="lt1"/>
+          </a:fontRef>
+        </p:style>
+        <p:txBody>
+          <a:bodyPr rtlCol="0" anchor="ctr"/>
+          <a:lstStyle/>
+          <a:p>
+            <a:pPr algn="ctr"/>
+          </a:p>
+        </p:txBody>
+      </p:sp>
+      <p:sp>
+        <p:nvSpPr>
+          <p:cNvPr id="3" name="TextBox 2"/>
           <p:cNvSpPr txBox="1"/>
           <p:nvPr/>
         </p:nvSpPr>
         <p:spPr>
           <a:xfrm>
-            <a:off x="548640" y="320040"/>
-            <a:ext cx="11064240" cy="822960"/>
+            <a:off x="777240" y="347472"/>
+            <a:ext cx="10515600" cy="731520"/>
           </a:xfrm>
           <a:prstGeom prst="rect">
             <a:avLst/>
@@ -3719,896 +5764,100 @@
           <a:noFill/>
         </p:spPr>
         <p:txBody>
-          <a:bodyPr wrap="square">
+          <a:bodyPr wrap="square" anchor="ctr">
             <a:spAutoFit/>
           </a:bodyPr>
           <a:lstStyle/>
           <a:p>
             <a:pPr>
               <a:spcAft>
-                <a:spcPts val="600"/>
+                <a:spcPts val="500"/>
               </a:spcAft>
             </a:pPr>
             <a:r>
               <a:rPr sz="2800" b="1">
                 <a:solidFill>
-                  <a:srgbClr val="1C5CAB"/>
+                  <a:srgbClr val="141E2E"/>
                 </a:solidFill>
                 <a:latin typeface="Apple SD Gothic Neo"/>
               </a:rPr>
-              <a:t>실제 분석 결과: 포항시 의료 인프라 격차 점수 상위</a:t>
+              <a:t>결과: 남구 외곽 읍·면 4곳이 먼저 볼 곳</a:t>
             </a:r>
           </a:p>
         </p:txBody>
       </p:sp>
       <p:graphicFrame>
         <p:nvGraphicFramePr>
-          <p:cNvPr id="3" name="Table 2"/>
+          <p:cNvPr id="4" name="Chart 3"/>
           <p:cNvGraphicFramePr>
             <a:graphicFrameLocks noGrp="1"/>
           </p:cNvGraphicFramePr>
           <p:nvPr/>
         </p:nvGraphicFramePr>
         <p:xfrm>
-          <a:off x="548640" y="1280160"/>
-          <a:ext cx="11064240" cy="3291840"/>
+          <a:off x="457200" y="1371600"/>
+          <a:ext cx="6766560" cy="4846320"/>
         </p:xfrm>
         <a:graphic>
-          <a:graphicData uri="http://schemas.openxmlformats.org/drawingml/2006/table">
-            <a:tbl>
-              <a:tblPr firstRow="1" bandRow="1">
-                <a:tableStyleId>{5C22544A-7EE6-4342-B048-85BDC9FD1C3A}</a:tableStyleId>
-              </a:tblPr>
-              <a:tblGrid>
-                <a:gridCol w="822960"/>
-                <a:gridCol w="1645920"/>
-                <a:gridCol w="1463040"/>
-                <a:gridCol w="1645920"/>
-                <a:gridCol w="2377440"/>
-                <a:gridCol w="3108960"/>
-              </a:tblGrid>
-              <a:tr h="365760">
-                <a:tc>
-                  <a:txBody>
-                    <a:bodyPr/>
-                    <a:lstStyle/>
-                    <a:p>
-                      <a:r>
-                        <a:rPr sz="1300" b="1">
-                          <a:latin typeface="Apple SD Gothic Neo"/>
-                        </a:rPr>
-                        <a:t>순위</a:t>
-                      </a:r>
-                    </a:p>
-                  </a:txBody>
-                  <a:tcPr/>
-                </a:tc>
-                <a:tc>
-                  <a:txBody>
-                    <a:bodyPr/>
-                    <a:lstStyle/>
-                    <a:p>
-                      <a:r>
-                        <a:rPr sz="1300" b="1">
-                          <a:latin typeface="Apple SD Gothic Neo"/>
-                        </a:rPr>
-                        <a:t>행정동</a:t>
-                      </a:r>
-                    </a:p>
-                  </a:txBody>
-                  <a:tcPr/>
-                </a:tc>
-                <a:tc>
-                  <a:txBody>
-                    <a:bodyPr/>
-                    <a:lstStyle/>
-                    <a:p>
-                      <a:r>
-                        <a:rPr sz="1300" b="1">
-                          <a:latin typeface="Apple SD Gothic Neo"/>
-                        </a:rPr>
-                        <a:t>격차 점수</a:t>
-                      </a:r>
-                    </a:p>
-                  </a:txBody>
-                  <a:tcPr/>
-                </a:tc>
-                <a:tc>
-                  <a:txBody>
-                    <a:bodyPr/>
-                    <a:lstStyle/>
-                    <a:p>
-                      <a:r>
-                        <a:rPr sz="1300" b="1">
-                          <a:latin typeface="Apple SD Gothic Neo"/>
-                        </a:rPr>
-                        <a:t>외국인 비율</a:t>
-                      </a:r>
-                    </a:p>
-                  </a:txBody>
-                  <a:tcPr/>
-                </a:tc>
-                <a:tc>
-                  <a:txBody>
-                    <a:bodyPr/>
-                    <a:lstStyle/>
-                    <a:p>
-                      <a:r>
-                        <a:rPr sz="1300" b="1">
-                          <a:latin typeface="Apple SD Gothic Neo"/>
-                        </a:rPr>
-                        <a:t>1·3·5km 순위 변동</a:t>
-                      </a:r>
-                    </a:p>
-                  </a:txBody>
-                  <a:tcPr/>
-                </a:tc>
-                <a:tc>
-                  <a:txBody>
-                    <a:bodyPr/>
-                    <a:lstStyle/>
-                    <a:p>
-                      <a:r>
-                        <a:rPr sz="1300" b="1">
-                          <a:latin typeface="Apple SD Gothic Neo"/>
-                        </a:rPr>
-                        <a:t>격차 유형</a:t>
-                      </a:r>
-                    </a:p>
-                  </a:txBody>
-                  <a:tcPr/>
-                </a:tc>
-              </a:tr>
-              <a:tr h="365760">
-                <a:tc>
-                  <a:txBody>
-                    <a:bodyPr/>
-                    <a:lstStyle/>
-                    <a:p>
-                      <a:r>
-                        <a:rPr sz="1300" b="0">
-                          <a:latin typeface="Apple SD Gothic Neo"/>
-                        </a:rPr>
-                        <a:t>1</a:t>
-                      </a:r>
-                    </a:p>
-                  </a:txBody>
-                  <a:tcPr/>
-                </a:tc>
-                <a:tc>
-                  <a:txBody>
-                    <a:bodyPr/>
-                    <a:lstStyle/>
-                    <a:p>
-                      <a:r>
-                        <a:rPr sz="1300" b="0">
-                          <a:latin typeface="Apple SD Gothic Neo"/>
-                        </a:rPr>
-                        <a:t>구룡포읍</a:t>
-                      </a:r>
-                    </a:p>
-                  </a:txBody>
-                  <a:tcPr/>
-                </a:tc>
-                <a:tc>
-                  <a:txBody>
-                    <a:bodyPr/>
-                    <a:lstStyle/>
-                    <a:p>
-                      <a:r>
-                        <a:rPr sz="1300" b="0">
-                          <a:latin typeface="Apple SD Gothic Neo"/>
-                        </a:rPr>
-                        <a:t>0.883</a:t>
-                      </a:r>
-                    </a:p>
-                  </a:txBody>
-                  <a:tcPr/>
-                </a:tc>
-                <a:tc>
-                  <a:txBody>
-                    <a:bodyPr/>
-                    <a:lstStyle/>
-                    <a:p>
-                      <a:r>
-                        <a:rPr sz="1300" b="0">
-                          <a:latin typeface="Apple SD Gothic Neo"/>
-                        </a:rPr>
-                        <a:t>15.1%</a:t>
-                      </a:r>
-                    </a:p>
-                  </a:txBody>
-                  <a:tcPr/>
-                </a:tc>
-                <a:tc>
-                  <a:txBody>
-                    <a:bodyPr/>
-                    <a:lstStyle/>
-                    <a:p>
-                      <a:r>
-                        <a:rPr sz="1300" b="0">
-                          <a:latin typeface="Apple SD Gothic Neo"/>
-                        </a:rPr>
-                        <a:t>0위</a:t>
-                      </a:r>
-                    </a:p>
-                  </a:txBody>
-                  <a:tcPr/>
-                </a:tc>
-                <a:tc>
-                  <a:txBody>
-                    <a:bodyPr/>
-                    <a:lstStyle/>
-                    <a:p>
-                      <a:r>
-                        <a:rPr sz="1300" b="0">
-                          <a:latin typeface="Apple SD Gothic Neo"/>
-                        </a:rPr>
-                        <a:t>복합 취약형</a:t>
-                      </a:r>
-                    </a:p>
-                  </a:txBody>
-                  <a:tcPr/>
-                </a:tc>
-              </a:tr>
-              <a:tr h="365760">
-                <a:tc>
-                  <a:txBody>
-                    <a:bodyPr/>
-                    <a:lstStyle/>
-                    <a:p>
-                      <a:r>
-                        <a:rPr sz="1300" b="0">
-                          <a:latin typeface="Apple SD Gothic Neo"/>
-                        </a:rPr>
-                        <a:t>2</a:t>
-                      </a:r>
-                    </a:p>
-                  </a:txBody>
-                  <a:tcPr/>
-                </a:tc>
-                <a:tc>
-                  <a:txBody>
-                    <a:bodyPr/>
-                    <a:lstStyle/>
-                    <a:p>
-                      <a:r>
-                        <a:rPr sz="1300" b="0">
-                          <a:latin typeface="Apple SD Gothic Neo"/>
-                        </a:rPr>
-                        <a:t>장기면</a:t>
-                      </a:r>
-                    </a:p>
-                  </a:txBody>
-                  <a:tcPr/>
-                </a:tc>
-                <a:tc>
-                  <a:txBody>
-                    <a:bodyPr/>
-                    <a:lstStyle/>
-                    <a:p>
-                      <a:r>
-                        <a:rPr sz="1300" b="0">
-                          <a:latin typeface="Apple SD Gothic Neo"/>
-                        </a:rPr>
-                        <a:t>0.724</a:t>
-                      </a:r>
-                    </a:p>
-                  </a:txBody>
-                  <a:tcPr/>
-                </a:tc>
-                <a:tc>
-                  <a:txBody>
-                    <a:bodyPr/>
-                    <a:lstStyle/>
-                    <a:p>
-                      <a:r>
-                        <a:rPr sz="1300" b="0">
-                          <a:latin typeface="Apple SD Gothic Neo"/>
-                        </a:rPr>
-                        <a:t>7.3%</a:t>
-                      </a:r>
-                    </a:p>
-                  </a:txBody>
-                  <a:tcPr/>
-                </a:tc>
-                <a:tc>
-                  <a:txBody>
-                    <a:bodyPr/>
-                    <a:lstStyle/>
-                    <a:p>
-                      <a:r>
-                        <a:rPr sz="1300" b="0">
-                          <a:latin typeface="Apple SD Gothic Neo"/>
-                        </a:rPr>
-                        <a:t>2위</a:t>
-                      </a:r>
-                    </a:p>
-                  </a:txBody>
-                  <a:tcPr/>
-                </a:tc>
-                <a:tc>
-                  <a:txBody>
-                    <a:bodyPr/>
-                    <a:lstStyle/>
-                    <a:p>
-                      <a:r>
-                        <a:rPr sz="1300" b="0">
-                          <a:latin typeface="Apple SD Gothic Neo"/>
-                        </a:rPr>
-                        <a:t>복합 취약형</a:t>
-                      </a:r>
-                    </a:p>
-                  </a:txBody>
-                  <a:tcPr/>
-                </a:tc>
-              </a:tr>
-              <a:tr h="365760">
-                <a:tc>
-                  <a:txBody>
-                    <a:bodyPr/>
-                    <a:lstStyle/>
-                    <a:p>
-                      <a:r>
-                        <a:rPr sz="1300" b="0">
-                          <a:latin typeface="Apple SD Gothic Neo"/>
-                        </a:rPr>
-                        <a:t>3</a:t>
-                      </a:r>
-                    </a:p>
-                  </a:txBody>
-                  <a:tcPr/>
-                </a:tc>
-                <a:tc>
-                  <a:txBody>
-                    <a:bodyPr/>
-                    <a:lstStyle/>
-                    <a:p>
-                      <a:r>
-                        <a:rPr sz="1300" b="0">
-                          <a:latin typeface="Apple SD Gothic Neo"/>
-                        </a:rPr>
-                        <a:t>호미곶면</a:t>
-                      </a:r>
-                    </a:p>
-                  </a:txBody>
-                  <a:tcPr/>
-                </a:tc>
-                <a:tc>
-                  <a:txBody>
-                    <a:bodyPr/>
-                    <a:lstStyle/>
-                    <a:p>
-                      <a:r>
-                        <a:rPr sz="1300" b="0">
-                          <a:latin typeface="Apple SD Gothic Neo"/>
-                        </a:rPr>
-                        <a:t>0.711</a:t>
-                      </a:r>
-                    </a:p>
-                  </a:txBody>
-                  <a:tcPr/>
-                </a:tc>
-                <a:tc>
-                  <a:txBody>
-                    <a:bodyPr/>
-                    <a:lstStyle/>
-                    <a:p>
-                      <a:r>
-                        <a:rPr sz="1300" b="0">
-                          <a:latin typeface="Apple SD Gothic Neo"/>
-                        </a:rPr>
-                        <a:t>10.9%</a:t>
-                      </a:r>
-                    </a:p>
-                  </a:txBody>
-                  <a:tcPr/>
-                </a:tc>
-                <a:tc>
-                  <a:txBody>
-                    <a:bodyPr/>
-                    <a:lstStyle/>
-                    <a:p>
-                      <a:r>
-                        <a:rPr sz="1300" b="0">
-                          <a:latin typeface="Apple SD Gothic Neo"/>
-                        </a:rPr>
-                        <a:t>1위</a:t>
-                      </a:r>
-                    </a:p>
-                  </a:txBody>
-                  <a:tcPr/>
-                </a:tc>
-                <a:tc>
-                  <a:txBody>
-                    <a:bodyPr/>
-                    <a:lstStyle/>
-                    <a:p>
-                      <a:r>
-                        <a:rPr sz="1300" b="0">
-                          <a:latin typeface="Apple SD Gothic Neo"/>
-                        </a:rPr>
-                        <a:t>복합 취약형</a:t>
-                      </a:r>
-                    </a:p>
-                  </a:txBody>
-                  <a:tcPr/>
-                </a:tc>
-              </a:tr>
-              <a:tr h="365760">
-                <a:tc>
-                  <a:txBody>
-                    <a:bodyPr/>
-                    <a:lstStyle/>
-                    <a:p>
-                      <a:r>
-                        <a:rPr sz="1300" b="0">
-                          <a:latin typeface="Apple SD Gothic Neo"/>
-                        </a:rPr>
-                        <a:t>4</a:t>
-                      </a:r>
-                    </a:p>
-                  </a:txBody>
-                  <a:tcPr/>
-                </a:tc>
-                <a:tc>
-                  <a:txBody>
-                    <a:bodyPr/>
-                    <a:lstStyle/>
-                    <a:p>
-                      <a:r>
-                        <a:rPr sz="1300" b="0">
-                          <a:latin typeface="Apple SD Gothic Neo"/>
-                        </a:rPr>
-                        <a:t>대송면</a:t>
-                      </a:r>
-                    </a:p>
-                  </a:txBody>
-                  <a:tcPr/>
-                </a:tc>
-                <a:tc>
-                  <a:txBody>
-                    <a:bodyPr/>
-                    <a:lstStyle/>
-                    <a:p>
-                      <a:r>
-                        <a:rPr sz="1300" b="0">
-                          <a:latin typeface="Apple SD Gothic Neo"/>
-                        </a:rPr>
-                        <a:t>0.639</a:t>
-                      </a:r>
-                    </a:p>
-                  </a:txBody>
-                  <a:tcPr/>
-                </a:tc>
-                <a:tc>
-                  <a:txBody>
-                    <a:bodyPr/>
-                    <a:lstStyle/>
-                    <a:p>
-                      <a:r>
-                        <a:rPr sz="1300" b="0">
-                          <a:latin typeface="Apple SD Gothic Neo"/>
-                        </a:rPr>
-                        <a:t>7.1%</a:t>
-                      </a:r>
-                    </a:p>
-                  </a:txBody>
-                  <a:tcPr/>
-                </a:tc>
-                <a:tc>
-                  <a:txBody>
-                    <a:bodyPr/>
-                    <a:lstStyle/>
-                    <a:p>
-                      <a:r>
-                        <a:rPr sz="1300" b="0">
-                          <a:latin typeface="Apple SD Gothic Neo"/>
-                        </a:rPr>
-                        <a:t>2위</a:t>
-                      </a:r>
-                    </a:p>
-                  </a:txBody>
-                  <a:tcPr/>
-                </a:tc>
-                <a:tc>
-                  <a:txBody>
-                    <a:bodyPr/>
-                    <a:lstStyle/>
-                    <a:p>
-                      <a:r>
-                        <a:rPr sz="1300" b="0">
-                          <a:latin typeface="Apple SD Gothic Neo"/>
-                        </a:rPr>
-                        <a:t>복합 취약형</a:t>
-                      </a:r>
-                    </a:p>
-                  </a:txBody>
-                  <a:tcPr/>
-                </a:tc>
-              </a:tr>
-              <a:tr h="365760">
-                <a:tc>
-                  <a:txBody>
-                    <a:bodyPr/>
-                    <a:lstStyle/>
-                    <a:p>
-                      <a:r>
-                        <a:rPr sz="1300" b="0">
-                          <a:latin typeface="Apple SD Gothic Neo"/>
-                        </a:rPr>
-                        <a:t>5</a:t>
-                      </a:r>
-                    </a:p>
-                  </a:txBody>
-                  <a:tcPr/>
-                </a:tc>
-                <a:tc>
-                  <a:txBody>
-                    <a:bodyPr/>
-                    <a:lstStyle/>
-                    <a:p>
-                      <a:r>
-                        <a:rPr sz="1300" b="0">
-                          <a:latin typeface="Apple SD Gothic Neo"/>
-                        </a:rPr>
-                        <a:t>죽장면</a:t>
-                      </a:r>
-                    </a:p>
-                  </a:txBody>
-                  <a:tcPr/>
-                </a:tc>
-                <a:tc>
-                  <a:txBody>
-                    <a:bodyPr/>
-                    <a:lstStyle/>
-                    <a:p>
-                      <a:r>
-                        <a:rPr sz="1300" b="0">
-                          <a:latin typeface="Apple SD Gothic Neo"/>
-                        </a:rPr>
-                        <a:t>0.540</a:t>
-                      </a:r>
-                    </a:p>
-                  </a:txBody>
-                  <a:tcPr/>
-                </a:tc>
-                <a:tc>
-                  <a:txBody>
-                    <a:bodyPr/>
-                    <a:lstStyle/>
-                    <a:p>
-                      <a:r>
-                        <a:rPr sz="1300" b="0">
-                          <a:latin typeface="Apple SD Gothic Neo"/>
-                        </a:rPr>
-                        <a:t>1.5%</a:t>
-                      </a:r>
-                    </a:p>
-                  </a:txBody>
-                  <a:tcPr/>
-                </a:tc>
-                <a:tc>
-                  <a:txBody>
-                    <a:bodyPr/>
-                    <a:lstStyle/>
-                    <a:p>
-                      <a:r>
-                        <a:rPr sz="1300" b="0">
-                          <a:latin typeface="Apple SD Gothic Neo"/>
-                        </a:rPr>
-                        <a:t>4위</a:t>
-                      </a:r>
-                    </a:p>
-                  </a:txBody>
-                  <a:tcPr/>
-                </a:tc>
-                <a:tc>
-                  <a:txBody>
-                    <a:bodyPr/>
-                    <a:lstStyle/>
-                    <a:p>
-                      <a:r>
-                        <a:rPr sz="1300" b="0">
-                          <a:latin typeface="Apple SD Gothic Neo"/>
-                        </a:rPr>
-                        <a:t>복합 취약형</a:t>
-                      </a:r>
-                    </a:p>
-                  </a:txBody>
-                  <a:tcPr/>
-                </a:tc>
-              </a:tr>
-              <a:tr h="365760">
-                <a:tc>
-                  <a:txBody>
-                    <a:bodyPr/>
-                    <a:lstStyle/>
-                    <a:p>
-                      <a:r>
-                        <a:rPr sz="1300" b="0">
-                          <a:latin typeface="Apple SD Gothic Neo"/>
-                        </a:rPr>
-                        <a:t>6</a:t>
-                      </a:r>
-                    </a:p>
-                  </a:txBody>
-                  <a:tcPr/>
-                </a:tc>
-                <a:tc>
-                  <a:txBody>
-                    <a:bodyPr/>
-                    <a:lstStyle/>
-                    <a:p>
-                      <a:r>
-                        <a:rPr sz="1300" b="0">
-                          <a:latin typeface="Apple SD Gothic Neo"/>
-                        </a:rPr>
-                        <a:t>동해면</a:t>
-                      </a:r>
-                    </a:p>
-                  </a:txBody>
-                  <a:tcPr/>
-                </a:tc>
-                <a:tc>
-                  <a:txBody>
-                    <a:bodyPr/>
-                    <a:lstStyle/>
-                    <a:p>
-                      <a:r>
-                        <a:rPr sz="1300" b="0">
-                          <a:latin typeface="Apple SD Gothic Neo"/>
-                        </a:rPr>
-                        <a:t>0.506</a:t>
-                      </a:r>
-                    </a:p>
-                  </a:txBody>
-                  <a:tcPr/>
-                </a:tc>
-                <a:tc>
-                  <a:txBody>
-                    <a:bodyPr/>
-                    <a:lstStyle/>
-                    <a:p>
-                      <a:r>
-                        <a:rPr sz="1300" b="0">
-                          <a:latin typeface="Apple SD Gothic Neo"/>
-                        </a:rPr>
-                        <a:t>1.6%</a:t>
-                      </a:r>
-                    </a:p>
-                  </a:txBody>
-                  <a:tcPr/>
-                </a:tc>
-                <a:tc>
-                  <a:txBody>
-                    <a:bodyPr/>
-                    <a:lstStyle/>
-                    <a:p>
-                      <a:r>
-                        <a:rPr sz="1300" b="0">
-                          <a:latin typeface="Apple SD Gothic Neo"/>
-                        </a:rPr>
-                        <a:t>7위</a:t>
-                      </a:r>
-                    </a:p>
-                  </a:txBody>
-                  <a:tcPr/>
-                </a:tc>
-                <a:tc>
-                  <a:txBody>
-                    <a:bodyPr/>
-                    <a:lstStyle/>
-                    <a:p>
-                      <a:r>
-                        <a:rPr sz="1300" b="0">
-                          <a:latin typeface="Apple SD Gothic Neo"/>
-                        </a:rPr>
-                        <a:t>복합 취약형</a:t>
-                      </a:r>
-                    </a:p>
-                  </a:txBody>
-                  <a:tcPr/>
-                </a:tc>
-              </a:tr>
-              <a:tr h="365760">
-                <a:tc>
-                  <a:txBody>
-                    <a:bodyPr/>
-                    <a:lstStyle/>
-                    <a:p>
-                      <a:r>
-                        <a:rPr sz="1300" b="0">
-                          <a:latin typeface="Apple SD Gothic Neo"/>
-                        </a:rPr>
-                        <a:t>7</a:t>
-                      </a:r>
-                    </a:p>
-                  </a:txBody>
-                  <a:tcPr/>
-                </a:tc>
-                <a:tc>
-                  <a:txBody>
-                    <a:bodyPr/>
-                    <a:lstStyle/>
-                    <a:p>
-                      <a:r>
-                        <a:rPr sz="1300" b="0">
-                          <a:latin typeface="Apple SD Gothic Neo"/>
-                        </a:rPr>
-                        <a:t>신광면</a:t>
-                      </a:r>
-                    </a:p>
-                  </a:txBody>
-                  <a:tcPr/>
-                </a:tc>
-                <a:tc>
-                  <a:txBody>
-                    <a:bodyPr/>
-                    <a:lstStyle/>
-                    <a:p>
-                      <a:r>
-                        <a:rPr sz="1300" b="0">
-                          <a:latin typeface="Apple SD Gothic Neo"/>
-                        </a:rPr>
-                        <a:t>0.505</a:t>
-                      </a:r>
-                    </a:p>
-                  </a:txBody>
-                  <a:tcPr/>
-                </a:tc>
-                <a:tc>
-                  <a:txBody>
-                    <a:bodyPr/>
-                    <a:lstStyle/>
-                    <a:p>
-                      <a:r>
-                        <a:rPr sz="1300" b="0">
-                          <a:latin typeface="Apple SD Gothic Neo"/>
-                        </a:rPr>
-                        <a:t>1.3%</a:t>
-                      </a:r>
-                    </a:p>
-                  </a:txBody>
-                  <a:tcPr/>
-                </a:tc>
-                <a:tc>
-                  <a:txBody>
-                    <a:bodyPr/>
-                    <a:lstStyle/>
-                    <a:p>
-                      <a:r>
-                        <a:rPr sz="1300" b="0">
-                          <a:latin typeface="Apple SD Gothic Neo"/>
-                        </a:rPr>
-                        <a:t>7위</a:t>
-                      </a:r>
-                    </a:p>
-                  </a:txBody>
-                  <a:tcPr/>
-                </a:tc>
-                <a:tc>
-                  <a:txBody>
-                    <a:bodyPr/>
-                    <a:lstStyle/>
-                    <a:p>
-                      <a:r>
-                        <a:rPr sz="1300" b="0">
-                          <a:latin typeface="Apple SD Gothic Neo"/>
-                        </a:rPr>
-                        <a:t>접근성 부족형</a:t>
-                      </a:r>
-                    </a:p>
-                  </a:txBody>
-                  <a:tcPr/>
-                </a:tc>
-              </a:tr>
-              <a:tr h="365760">
-                <a:tc>
-                  <a:txBody>
-                    <a:bodyPr/>
-                    <a:lstStyle/>
-                    <a:p>
-                      <a:r>
-                        <a:rPr sz="1300" b="0">
-                          <a:latin typeface="Apple SD Gothic Neo"/>
-                        </a:rPr>
-                        <a:t>8</a:t>
-                      </a:r>
-                    </a:p>
-                  </a:txBody>
-                  <a:tcPr/>
-                </a:tc>
-                <a:tc>
-                  <a:txBody>
-                    <a:bodyPr/>
-                    <a:lstStyle/>
-                    <a:p>
-                      <a:r>
-                        <a:rPr sz="1300" b="0">
-                          <a:latin typeface="Apple SD Gothic Neo"/>
-                        </a:rPr>
-                        <a:t>청하면</a:t>
-                      </a:r>
-                    </a:p>
-                  </a:txBody>
-                  <a:tcPr/>
-                </a:tc>
-                <a:tc>
-                  <a:txBody>
-                    <a:bodyPr/>
-                    <a:lstStyle/>
-                    <a:p>
-                      <a:r>
-                        <a:rPr sz="1300" b="0">
-                          <a:latin typeface="Apple SD Gothic Neo"/>
-                        </a:rPr>
-                        <a:t>0.501</a:t>
-                      </a:r>
-                    </a:p>
-                  </a:txBody>
-                  <a:tcPr/>
-                </a:tc>
-                <a:tc>
-                  <a:txBody>
-                    <a:bodyPr/>
-                    <a:lstStyle/>
-                    <a:p>
-                      <a:r>
-                        <a:rPr sz="1300" b="0">
-                          <a:latin typeface="Apple SD Gothic Neo"/>
-                        </a:rPr>
-                        <a:t>3.8%</a:t>
-                      </a:r>
-                    </a:p>
-                  </a:txBody>
-                  <a:tcPr/>
-                </a:tc>
-                <a:tc>
-                  <a:txBody>
-                    <a:bodyPr/>
-                    <a:lstStyle/>
-                    <a:p>
-                      <a:r>
-                        <a:rPr sz="1300" b="0">
-                          <a:latin typeface="Apple SD Gothic Neo"/>
-                        </a:rPr>
-                        <a:t>8위</a:t>
-                      </a:r>
-                    </a:p>
-                  </a:txBody>
-                  <a:tcPr/>
-                </a:tc>
-                <a:tc>
-                  <a:txBody>
-                    <a:bodyPr/>
-                    <a:lstStyle/>
-                    <a:p>
-                      <a:r>
-                        <a:rPr sz="1300" b="0">
-                          <a:latin typeface="Apple SD Gothic Neo"/>
-                        </a:rPr>
-                        <a:t>복합 취약형</a:t>
-                      </a:r>
-                    </a:p>
-                  </a:txBody>
-                  <a:tcPr/>
-                </a:tc>
-              </a:tr>
-            </a:tbl>
+          <a:graphicData uri="http://schemas.openxmlformats.org/drawingml/2006/chart">
+            <c:chart xmlns:c="http://schemas.openxmlformats.org/drawingml/2006/chart" r:id="rId2"/>
           </a:graphicData>
         </a:graphic>
       </p:graphicFrame>
       <p:sp>
         <p:nvSpPr>
-          <p:cNvPr id="4" name="TextBox 3"/>
+          <p:cNvPr id="5" name="Rectangle 4"/>
+          <p:cNvSpPr/>
+          <p:nvPr/>
+        </p:nvSpPr>
+        <p:spPr>
+          <a:xfrm>
+            <a:off x="7498079" y="1463040"/>
+            <a:ext cx="4142232" cy="2103120"/>
+          </a:xfrm>
+          <a:prstGeom prst="rect">
+            <a:avLst/>
+          </a:prstGeom>
+          <a:solidFill>
+            <a:srgbClr val="ECF8F5"/>
+          </a:solidFill>
+          <a:ln>
+            <a:noFill/>
+          </a:ln>
+          <a:effectLst/>
+        </p:spPr>
+        <p:style>
+          <a:lnRef idx="1">
+            <a:schemeClr val="accent1"/>
+          </a:lnRef>
+          <a:fillRef idx="3">
+            <a:schemeClr val="accent1"/>
+          </a:fillRef>
+          <a:effectRef idx="2">
+            <a:schemeClr val="accent1"/>
+          </a:effectRef>
+          <a:fontRef idx="minor">
+            <a:schemeClr val="lt1"/>
+          </a:fontRef>
+        </p:style>
+        <p:txBody>
+          <a:bodyPr rtlCol="0" anchor="ctr"/>
+          <a:lstStyle/>
+          <a:p>
+            <a:pPr algn="ctr"/>
+          </a:p>
+        </p:txBody>
+      </p:sp>
+      <p:sp>
+        <p:nvSpPr>
+          <p:cNvPr id="6" name="TextBox 5"/>
           <p:cNvSpPr txBox="1"/>
           <p:nvPr/>
         </p:nvSpPr>
         <p:spPr>
           <a:xfrm>
-            <a:off x="548640" y="4846320"/>
-            <a:ext cx="11064240" cy="1371600"/>
+            <a:off x="7726679" y="1554480"/>
+            <a:ext cx="3749039" cy="1920240"/>
           </a:xfrm>
           <a:prstGeom prst="rect">
             <a:avLst/>
@@ -4616,40 +5865,95 @@
           <a:noFill/>
         </p:spPr>
         <p:txBody>
-          <a:bodyPr wrap="square">
+          <a:bodyPr wrap="square" anchor="ctr">
             <a:spAutoFit/>
           </a:bodyPr>
           <a:lstStyle/>
           <a:p>
             <a:pPr>
               <a:spcAft>
-                <a:spcPts val="600"/>
+                <a:spcPts val="500"/>
               </a:spcAft>
             </a:pPr>
             <a:r>
-              <a:rPr sz="1500" b="0">
-                <a:solidFill>
-                  <a:srgbClr val="52514E"/>
+              <a:rPr sz="4000" b="1">
+                <a:solidFill>
+                  <a:srgbClr val="0F9688"/>
                 </a:solidFill>
                 <a:latin typeface="Apple SD Gothic Neo"/>
               </a:rPr>
-              <a:t>남구 외곽 읍·면(구룡포읍·장기면·호미곶면·대송면)은 인구가 적고 외국인 비율이 높으며 의료시설이 드뭅니다.</a:t>
+              <a:t>4곳</a:t>
             </a:r>
           </a:p>
           <a:p>
             <a:pPr>
               <a:spcAft>
-                <a:spcPts val="600"/>
+                <a:spcPts val="500"/>
               </a:spcAft>
             </a:pPr>
             <a:r>
-              <a:rPr sz="1500" b="0">
-                <a:solidFill>
-                  <a:srgbClr val="52514E"/>
+              <a:rPr sz="1400" b="0">
+                <a:solidFill>
+                  <a:srgbClr val="141E2E"/>
                 </a:solidFill>
                 <a:latin typeface="Apple SD Gothic Neo"/>
               </a:rPr>
-              <a:t>순위가 크게 흔들리는 동(예: 송라면 변동 14위)은 '몇 위'라고 단정하지 않습니다.</a:t>
+              <a:t>기준 거리를 바꿔도 5위 안에 남은 동 (진한 막대)</a:t>
+            </a:r>
+          </a:p>
+        </p:txBody>
+      </p:sp>
+      <p:sp>
+        <p:nvSpPr>
+          <p:cNvPr id="7" name="TextBox 6"/>
+          <p:cNvSpPr txBox="1"/>
+          <p:nvPr/>
+        </p:nvSpPr>
+        <p:spPr>
+          <a:xfrm>
+            <a:off x="7498079" y="3794760"/>
+            <a:ext cx="4142232" cy="2377440"/>
+          </a:xfrm>
+          <a:prstGeom prst="rect">
+            <a:avLst/>
+          </a:prstGeom>
+          <a:noFill/>
+        </p:spPr>
+        <p:txBody>
+          <a:bodyPr wrap="square" anchor="t">
+            <a:spAutoFit/>
+          </a:bodyPr>
+          <a:lstStyle/>
+          <a:p>
+            <a:pPr>
+              <a:spcAft>
+                <a:spcPts val="500"/>
+              </a:spcAft>
+            </a:pPr>
+            <a:r>
+              <a:rPr sz="1500" b="0">
+                <a:solidFill>
+                  <a:srgbClr val="141E2E"/>
+                </a:solidFill>
+                <a:latin typeface="Apple SD Gothic Neo"/>
+              </a:rPr>
+              <a:t>구룡포읍, 장기면, 호미곶면, 대송면은 포항에서 외국인 비율이 가장 높은 네 곳이고, 의료 접근성은 중간 이하입니다.</a:t>
+            </a:r>
+          </a:p>
+          <a:p>
+            <a:pPr>
+              <a:spcAft>
+                <a:spcPts val="500"/>
+              </a:spcAft>
+            </a:pPr>
+            <a:r>
+              <a:rPr sz="1500" b="0">
+                <a:solidFill>
+                  <a:srgbClr val="555F6D"/>
+                </a:solidFill>
+                <a:latin typeface="Apple SD Gothic Neo"/>
+              </a:rPr>
+              <a:t>반대로 송라면처럼 기준 거리에 따라 순위가 14계단 움직이는 동은 몇 위라고 말하지 않았습니다.</a:t>
             </a:r>
           </a:p>
         </p:txBody>
@@ -4674,14 +5978,58 @@
       <p:grpSpPr/>
       <p:sp>
         <p:nvSpPr>
-          <p:cNvPr id="2" name="TextBox 1"/>
+          <p:cNvPr id="2" name="Rectangle 1"/>
+          <p:cNvSpPr/>
+          <p:nvPr/>
+        </p:nvSpPr>
+        <p:spPr>
+          <a:xfrm>
+            <a:off x="548640" y="411480"/>
+            <a:ext cx="73152" cy="548640"/>
+          </a:xfrm>
+          <a:prstGeom prst="rect">
+            <a:avLst/>
+          </a:prstGeom>
+          <a:solidFill>
+            <a:srgbClr val="0F9688"/>
+          </a:solidFill>
+          <a:ln>
+            <a:noFill/>
+          </a:ln>
+          <a:effectLst/>
+        </p:spPr>
+        <p:style>
+          <a:lnRef idx="1">
+            <a:schemeClr val="accent1"/>
+          </a:lnRef>
+          <a:fillRef idx="3">
+            <a:schemeClr val="accent1"/>
+          </a:fillRef>
+          <a:effectRef idx="2">
+            <a:schemeClr val="accent1"/>
+          </a:effectRef>
+          <a:fontRef idx="minor">
+            <a:schemeClr val="lt1"/>
+          </a:fontRef>
+        </p:style>
+        <p:txBody>
+          <a:bodyPr rtlCol="0" anchor="ctr"/>
+          <a:lstStyle/>
+          <a:p>
+            <a:pPr algn="ctr"/>
+          </a:p>
+        </p:txBody>
+      </p:sp>
+      <p:sp>
+        <p:nvSpPr>
+          <p:cNvPr id="3" name="TextBox 2"/>
           <p:cNvSpPr txBox="1"/>
           <p:nvPr/>
         </p:nvSpPr>
         <p:spPr>
           <a:xfrm>
-            <a:off x="548640" y="320040"/>
-            <a:ext cx="11064240" cy="822960"/>
+            <a:off x="777240" y="347472"/>
+            <a:ext cx="10515600" cy="731520"/>
           </a:xfrm>
           <a:prstGeom prst="rect">
             <a:avLst/>
@@ -4689,62 +6037,128 @@
           <a:noFill/>
         </p:spPr>
         <p:txBody>
-          <a:bodyPr wrap="square">
+          <a:bodyPr wrap="square" anchor="ctr">
             <a:spAutoFit/>
           </a:bodyPr>
           <a:lstStyle/>
           <a:p>
             <a:pPr>
               <a:spcAft>
-                <a:spcPts val="600"/>
+                <a:spcPts val="500"/>
               </a:spcAft>
             </a:pPr>
             <a:r>
               <a:rPr sz="2800" b="1">
                 <a:solidFill>
-                  <a:srgbClr val="1C5CAB"/>
+                  <a:srgbClr val="141E2E"/>
                 </a:solidFill>
                 <a:latin typeface="Apple SD Gothic Neo"/>
               </a:rPr>
-              <a:t>산출물: 통합 대시보드와 정책 카드</a:t>
-            </a:r>
-          </a:p>
-        </p:txBody>
-      </p:sp>
-      <p:pic>
-        <p:nvPicPr>
-          <p:cNvPr id="3" name="Picture 2" descr="gap_heatmap.png"/>
-          <p:cNvPicPr>
-            <a:picLocks noChangeAspect="1"/>
-          </p:cNvPicPr>
-          <p:nvPr/>
-        </p:nvPicPr>
-        <p:blipFill>
-          <a:blip r:embed="rId2"/>
-          <a:stretch>
-            <a:fillRect/>
-          </a:stretch>
-        </p:blipFill>
-        <p:spPr>
-          <a:xfrm>
-            <a:off x="457200" y="1371600"/>
-            <a:ext cx="5852160" cy="4180114"/>
-          </a:xfrm>
-          <a:prstGeom prst="rect">
-            <a:avLst/>
-          </a:prstGeom>
-        </p:spPr>
-      </p:pic>
-      <p:sp>
-        <p:nvSpPr>
-          <p:cNvPr id="4" name="TextBox 3"/>
+              <a:t>다른 방법으로도 비교해 봤습니다</a:t>
+            </a:r>
+          </a:p>
+        </p:txBody>
+      </p:sp>
+      <p:sp>
+        <p:nvSpPr>
+          <p:cNvPr id="4" name="Rectangle 3"/>
+          <p:cNvSpPr/>
+          <p:nvPr/>
+        </p:nvSpPr>
+        <p:spPr>
+          <a:xfrm>
+            <a:off x="548640" y="1463040"/>
+            <a:ext cx="3566160" cy="2560320"/>
+          </a:xfrm>
+          <a:prstGeom prst="rect">
+            <a:avLst/>
+          </a:prstGeom>
+          <a:solidFill>
+            <a:srgbClr val="F6F8FA"/>
+          </a:solidFill>
+          <a:ln w="9525">
+            <a:solidFill>
+              <a:srgbClr val="E2E6EA"/>
+            </a:solidFill>
+          </a:ln>
+          <a:effectLst/>
+        </p:spPr>
+        <p:style>
+          <a:lnRef idx="1">
+            <a:schemeClr val="accent1"/>
+          </a:lnRef>
+          <a:fillRef idx="3">
+            <a:schemeClr val="accent1"/>
+          </a:fillRef>
+          <a:effectRef idx="2">
+            <a:schemeClr val="accent1"/>
+          </a:effectRef>
+          <a:fontRef idx="minor">
+            <a:schemeClr val="lt1"/>
+          </a:fontRef>
+        </p:style>
+        <p:txBody>
+          <a:bodyPr rtlCol="0" anchor="ctr"/>
+          <a:lstStyle/>
+          <a:p>
+            <a:pPr algn="ctr"/>
+          </a:p>
+        </p:txBody>
+      </p:sp>
+      <p:sp>
+        <p:nvSpPr>
+          <p:cNvPr id="5" name="Rectangle 4"/>
+          <p:cNvSpPr/>
+          <p:nvPr/>
+        </p:nvSpPr>
+        <p:spPr>
+          <a:xfrm>
+            <a:off x="548640" y="1463040"/>
+            <a:ext cx="3566160" cy="64008"/>
+          </a:xfrm>
+          <a:prstGeom prst="rect">
+            <a:avLst/>
+          </a:prstGeom>
+          <a:solidFill>
+            <a:srgbClr val="0F9688"/>
+          </a:solidFill>
+          <a:ln>
+            <a:noFill/>
+          </a:ln>
+          <a:effectLst/>
+        </p:spPr>
+        <p:style>
+          <a:lnRef idx="1">
+            <a:schemeClr val="accent1"/>
+          </a:lnRef>
+          <a:fillRef idx="3">
+            <a:schemeClr val="accent1"/>
+          </a:fillRef>
+          <a:effectRef idx="2">
+            <a:schemeClr val="accent1"/>
+          </a:effectRef>
+          <a:fontRef idx="minor">
+            <a:schemeClr val="lt1"/>
+          </a:fontRef>
+        </p:style>
+        <p:txBody>
+          <a:bodyPr rtlCol="0" anchor="ctr"/>
+          <a:lstStyle/>
+          <a:p>
+            <a:pPr algn="ctr"/>
+          </a:p>
+        </p:txBody>
+      </p:sp>
+      <p:sp>
+        <p:nvSpPr>
+          <p:cNvPr id="6" name="TextBox 5"/>
           <p:cNvSpPr txBox="1"/>
           <p:nvPr/>
         </p:nvSpPr>
         <p:spPr>
           <a:xfrm>
-            <a:off x="6492240" y="1280160"/>
-            <a:ext cx="5212080" cy="5029200"/>
+            <a:off x="777240" y="1691640"/>
+            <a:ext cx="3108960" cy="2286000"/>
           </a:xfrm>
           <a:prstGeom prst="rect">
             <a:avLst/>
@@ -4752,67 +6166,477 @@
           <a:noFill/>
         </p:spPr>
         <p:txBody>
-          <a:bodyPr wrap="square">
+          <a:bodyPr wrap="square" anchor="t">
             <a:spAutoFit/>
           </a:bodyPr>
           <a:lstStyle/>
           <a:p>
             <a:pPr>
               <a:spcAft>
-                <a:spcPts val="600"/>
+                <a:spcPts val="500"/>
               </a:spcAft>
             </a:pPr>
             <a:r>
-              <a:rPr sz="1300" b="1">
+              <a:rPr sz="1700" b="1">
+                <a:solidFill>
+                  <a:srgbClr val="141E2E"/>
+                </a:solidFill>
                 <a:latin typeface="Apple SD Gothic Neo"/>
               </a:rPr>
-              <a:t>구룡포읍 정책 카드 (격차 1위)</a:t>
+              <a:t>가중치를 바꿔도</a:t>
             </a:r>
           </a:p>
           <a:p>
             <a:pPr>
               <a:spcAft>
-                <a:spcPts val="600"/>
+                <a:spcPts val="500"/>
               </a:spcAft>
             </a:pPr>
+            <a:r>
+              <a:rPr sz="2800" b="1">
+                <a:solidFill>
+                  <a:srgbClr val="0F9688"/>
+                </a:solidFill>
+                <a:latin typeface="Apple SD Gothic Neo"/>
+              </a:rPr>
+              <a:t>0.4 이상</a:t>
+            </a:r>
           </a:p>
           <a:p>
             <a:pPr>
               <a:spcAft>
-                <a:spcPts val="600"/>
+                <a:spcPts val="500"/>
               </a:spcAft>
             </a:pPr>
             <a:r>
               <a:rPr sz="1300" b="0">
+                <a:solidFill>
+                  <a:srgbClr val="555F6D"/>
+                </a:solidFill>
                 <a:latin typeface="Apple SD Gothic Neo"/>
               </a:rPr>
-              <a:t>[근거] 경북 1권역 조사에 따르면 병원/의원 이용 비율은 62.3%라고 합니다.</a:t>
-            </a:r>
-          </a:p>
+              <a:t>외국인 비율 가중치를 0부터 1까지 바꿔 봤습니다. 0.4 이상이면 1·3·5km 어디서든 4곳이 5위 안입니다. 접근성만 크게 보면 밀려납니다.</a:t>
+            </a:r>
+          </a:p>
+        </p:txBody>
+      </p:sp>
+      <p:sp>
+        <p:nvSpPr>
+          <p:cNvPr id="7" name="Rectangle 6"/>
+          <p:cNvSpPr/>
+          <p:nvPr/>
+        </p:nvSpPr>
+        <p:spPr>
+          <a:xfrm>
+            <a:off x="4315968" y="1463040"/>
+            <a:ext cx="3566160" cy="2560320"/>
+          </a:xfrm>
+          <a:prstGeom prst="rect">
+            <a:avLst/>
+          </a:prstGeom>
+          <a:solidFill>
+            <a:srgbClr val="F6F8FA"/>
+          </a:solidFill>
+          <a:ln w="9525">
+            <a:solidFill>
+              <a:srgbClr val="E2E6EA"/>
+            </a:solidFill>
+          </a:ln>
+          <a:effectLst/>
+        </p:spPr>
+        <p:style>
+          <a:lnRef idx="1">
+            <a:schemeClr val="accent1"/>
+          </a:lnRef>
+          <a:fillRef idx="3">
+            <a:schemeClr val="accent1"/>
+          </a:fillRef>
+          <a:effectRef idx="2">
+            <a:schemeClr val="accent1"/>
+          </a:effectRef>
+          <a:fontRef idx="minor">
+            <a:schemeClr val="lt1"/>
+          </a:fontRef>
+        </p:style>
+        <p:txBody>
+          <a:bodyPr rtlCol="0" anchor="ctr"/>
+          <a:lstStyle/>
+          <a:p>
+            <a:pPr algn="ctr"/>
+          </a:p>
+        </p:txBody>
+      </p:sp>
+      <p:sp>
+        <p:nvSpPr>
+          <p:cNvPr id="8" name="Rectangle 7"/>
+          <p:cNvSpPr/>
+          <p:nvPr/>
+        </p:nvSpPr>
+        <p:spPr>
+          <a:xfrm>
+            <a:off x="4315968" y="1463040"/>
+            <a:ext cx="3566160" cy="64008"/>
+          </a:xfrm>
+          <a:prstGeom prst="rect">
+            <a:avLst/>
+          </a:prstGeom>
+          <a:solidFill>
+            <a:srgbClr val="0F9688"/>
+          </a:solidFill>
+          <a:ln>
+            <a:noFill/>
+          </a:ln>
+          <a:effectLst/>
+        </p:spPr>
+        <p:style>
+          <a:lnRef idx="1">
+            <a:schemeClr val="accent1"/>
+          </a:lnRef>
+          <a:fillRef idx="3">
+            <a:schemeClr val="accent1"/>
+          </a:fillRef>
+          <a:effectRef idx="2">
+            <a:schemeClr val="accent1"/>
+          </a:effectRef>
+          <a:fontRef idx="minor">
+            <a:schemeClr val="lt1"/>
+          </a:fontRef>
+        </p:style>
+        <p:txBody>
+          <a:bodyPr rtlCol="0" anchor="ctr"/>
+          <a:lstStyle/>
+          <a:p>
+            <a:pPr algn="ctr"/>
+          </a:p>
+        </p:txBody>
+      </p:sp>
+      <p:sp>
+        <p:nvSpPr>
+          <p:cNvPr id="9" name="TextBox 8"/>
+          <p:cNvSpPr txBox="1"/>
+          <p:nvPr/>
+        </p:nvSpPr>
+        <p:spPr>
+          <a:xfrm>
+            <a:off x="4544568" y="1691640"/>
+            <a:ext cx="3108960" cy="2286000"/>
+          </a:xfrm>
+          <a:prstGeom prst="rect">
+            <a:avLst/>
+          </a:prstGeom>
+          <a:noFill/>
+        </p:spPr>
+        <p:txBody>
+          <a:bodyPr wrap="square" anchor="t">
+            <a:spAutoFit/>
+          </a:bodyPr>
+          <a:lstStyle/>
           <a:p>
             <a:pPr>
               <a:spcAft>
-                <a:spcPts val="600"/>
+                <a:spcPts val="500"/>
               </a:spcAft>
             </a:pPr>
             <a:r>
-              <a:rPr sz="1300" b="0">
+              <a:rPr sz="1700" b="1">
+                <a:solidFill>
+                  <a:srgbClr val="141E2E"/>
+                </a:solidFill>
                 <a:latin typeface="Apple SD Gothic Neo"/>
               </a:rPr>
-              <a:t>포항시 구룡포읍의 외국인 주민 비율은 15.1%로, 읍 주민센터에 외국인 전용 건강 상담 창구를 설치하고 주 2회 간호사가 방문하여 기본 건강 검진 및 언어 지원을 제공합니다.</a:t>
+              <a:t>접근성 지표를 바꿔도</a:t>
             </a:r>
           </a:p>
           <a:p>
             <a:pPr>
               <a:spcAft>
-                <a:spcPts val="600"/>
+                <a:spcPts val="500"/>
               </a:spcAft>
             </a:pPr>
             <a:r>
-              <a:rPr sz="1300" b="0">
+              <a:rPr sz="2800" b="1">
+                <a:solidFill>
+                  <a:srgbClr val="0F9688"/>
+                </a:solidFill>
                 <a:latin typeface="Apple SD Gothic Neo"/>
               </a:rPr>
-              <a:t>이와 함께 지역 내 문화센터에서 모국어별 건강 교육 워크숍을 정기적으로 개최하여 예방 의료 인식을 높입니다.</a:t>
+              <a:t>4개 모두</a:t>
+            </a:r>
+          </a:p>
+          <a:p>
+            <a:pPr>
+              <a:spcAft>
+                <a:spcPts val="500"/>
+              </a:spcAft>
+            </a:pPr>
+            <a:r>
+              <a:rPr sz="1300" b="0">
+                <a:solidFill>
+                  <a:srgbClr val="555F6D"/>
+                </a:solidFill>
+                <a:latin typeface="Apple SD Gothic Neo"/>
+              </a:rPr>
+              <a:t>E2SFCA, 3km 안 의사 수, 가장 가까운 병원까지 거리, 동 안 의사 수로 바꿔 봤습니다. 2SFCA와 순위상관은 0.44~0.90입니다.</a:t>
+            </a:r>
+          </a:p>
+        </p:txBody>
+      </p:sp>
+      <p:sp>
+        <p:nvSpPr>
+          <p:cNvPr id="10" name="Rectangle 9"/>
+          <p:cNvSpPr/>
+          <p:nvPr/>
+        </p:nvSpPr>
+        <p:spPr>
+          <a:xfrm>
+            <a:off x="8074152" y="1463040"/>
+            <a:ext cx="3566160" cy="2560320"/>
+          </a:xfrm>
+          <a:prstGeom prst="rect">
+            <a:avLst/>
+          </a:prstGeom>
+          <a:solidFill>
+            <a:srgbClr val="F6F8FA"/>
+          </a:solidFill>
+          <a:ln w="9525">
+            <a:solidFill>
+              <a:srgbClr val="E2E6EA"/>
+            </a:solidFill>
+          </a:ln>
+          <a:effectLst/>
+        </p:spPr>
+        <p:style>
+          <a:lnRef idx="1">
+            <a:schemeClr val="accent1"/>
+          </a:lnRef>
+          <a:fillRef idx="3">
+            <a:schemeClr val="accent1"/>
+          </a:fillRef>
+          <a:effectRef idx="2">
+            <a:schemeClr val="accent1"/>
+          </a:effectRef>
+          <a:fontRef idx="minor">
+            <a:schemeClr val="lt1"/>
+          </a:fontRef>
+        </p:style>
+        <p:txBody>
+          <a:bodyPr rtlCol="0" anchor="ctr"/>
+          <a:lstStyle/>
+          <a:p>
+            <a:pPr algn="ctr"/>
+          </a:p>
+        </p:txBody>
+      </p:sp>
+      <p:sp>
+        <p:nvSpPr>
+          <p:cNvPr id="11" name="Rectangle 10"/>
+          <p:cNvSpPr/>
+          <p:nvPr/>
+        </p:nvSpPr>
+        <p:spPr>
+          <a:xfrm>
+            <a:off x="8074152" y="1463040"/>
+            <a:ext cx="3566160" cy="64008"/>
+          </a:xfrm>
+          <a:prstGeom prst="rect">
+            <a:avLst/>
+          </a:prstGeom>
+          <a:solidFill>
+            <a:srgbClr val="0F9688"/>
+          </a:solidFill>
+          <a:ln>
+            <a:noFill/>
+          </a:ln>
+          <a:effectLst/>
+        </p:spPr>
+        <p:style>
+          <a:lnRef idx="1">
+            <a:schemeClr val="accent1"/>
+          </a:lnRef>
+          <a:fillRef idx="3">
+            <a:schemeClr val="accent1"/>
+          </a:fillRef>
+          <a:effectRef idx="2">
+            <a:schemeClr val="accent1"/>
+          </a:effectRef>
+          <a:fontRef idx="minor">
+            <a:schemeClr val="lt1"/>
+          </a:fontRef>
+        </p:style>
+        <p:txBody>
+          <a:bodyPr rtlCol="0" anchor="ctr"/>
+          <a:lstStyle/>
+          <a:p>
+            <a:pPr algn="ctr"/>
+          </a:p>
+        </p:txBody>
+      </p:sp>
+      <p:sp>
+        <p:nvSpPr>
+          <p:cNvPr id="12" name="TextBox 11"/>
+          <p:cNvSpPr txBox="1"/>
+          <p:nvPr/>
+        </p:nvSpPr>
+        <p:spPr>
+          <a:xfrm>
+            <a:off x="8302752" y="1691640"/>
+            <a:ext cx="3108960" cy="2286000"/>
+          </a:xfrm>
+          <a:prstGeom prst="rect">
+            <a:avLst/>
+          </a:prstGeom>
+          <a:noFill/>
+        </p:spPr>
+        <p:txBody>
+          <a:bodyPr wrap="square" anchor="t">
+            <a:spAutoFit/>
+          </a:bodyPr>
+          <a:lstStyle/>
+          <a:p>
+            <a:pPr>
+              <a:spcAft>
+                <a:spcPts val="500"/>
+              </a:spcAft>
+            </a:pPr>
+            <a:r>
+              <a:rPr sz="1700" b="1">
+                <a:solidFill>
+                  <a:srgbClr val="141E2E"/>
+                </a:solidFill>
+                <a:latin typeface="Apple SD Gothic Neo"/>
+              </a:rPr>
+              <a:t>도로 거리로 재도</a:t>
+            </a:r>
+          </a:p>
+          <a:p>
+            <a:pPr>
+              <a:spcAft>
+                <a:spcPts val="500"/>
+              </a:spcAft>
+            </a:pPr>
+            <a:r>
+              <a:rPr sz="2800" b="1">
+                <a:solidFill>
+                  <a:srgbClr val="0F9688"/>
+                </a:solidFill>
+                <a:latin typeface="Apple SD Gothic Neo"/>
+              </a:rPr>
+              <a:t>1·3·5km 모두</a:t>
+            </a:r>
+          </a:p>
+          <a:p>
+            <a:pPr>
+              <a:spcAft>
+                <a:spcPts val="500"/>
+              </a:spcAft>
+            </a:pPr>
+            <a:r>
+              <a:rPr sz="1300" b="0">
+                <a:solidFill>
+                  <a:srgbClr val="555F6D"/>
+                </a:solidFill>
+                <a:latin typeface="Apple SD Gothic Neo"/>
+              </a:rPr>
+              <a:t>실제 도로는 직선보다 1.28배쯤 멉니다. 도로 거리로 1·3·5km를 다시 계산해도 순위상관이 0.90 이상이었습니다.</a:t>
+            </a:r>
+          </a:p>
+        </p:txBody>
+      </p:sp>
+      <p:sp>
+        <p:nvSpPr>
+          <p:cNvPr id="13" name="Rectangle 12"/>
+          <p:cNvSpPr/>
+          <p:nvPr/>
+        </p:nvSpPr>
+        <p:spPr>
+          <a:xfrm>
+            <a:off x="548640" y="4343400"/>
+            <a:ext cx="11091672" cy="1371600"/>
+          </a:xfrm>
+          <a:prstGeom prst="rect">
+            <a:avLst/>
+          </a:prstGeom>
+          <a:solidFill>
+            <a:srgbClr val="ECF8F5"/>
+          </a:solidFill>
+          <a:ln>
+            <a:noFill/>
+          </a:ln>
+          <a:effectLst/>
+        </p:spPr>
+        <p:style>
+          <a:lnRef idx="1">
+            <a:schemeClr val="accent1"/>
+          </a:lnRef>
+          <a:fillRef idx="3">
+            <a:schemeClr val="accent1"/>
+          </a:fillRef>
+          <a:effectRef idx="2">
+            <a:schemeClr val="accent1"/>
+          </a:effectRef>
+          <a:fontRef idx="minor">
+            <a:schemeClr val="lt1"/>
+          </a:fontRef>
+        </p:style>
+        <p:txBody>
+          <a:bodyPr rtlCol="0" anchor="ctr"/>
+          <a:lstStyle/>
+          <a:p>
+            <a:pPr algn="ctr"/>
+          </a:p>
+        </p:txBody>
+      </p:sp>
+      <p:sp>
+        <p:nvSpPr>
+          <p:cNvPr id="14" name="TextBox 13"/>
+          <p:cNvSpPr txBox="1"/>
+          <p:nvPr/>
+        </p:nvSpPr>
+        <p:spPr>
+          <a:xfrm>
+            <a:off x="822960" y="4389120"/>
+            <a:ext cx="10515600" cy="1280160"/>
+          </a:xfrm>
+          <a:prstGeom prst="rect">
+            <a:avLst/>
+          </a:prstGeom>
+          <a:noFill/>
+        </p:spPr>
+        <p:txBody>
+          <a:bodyPr wrap="square" anchor="ctr">
+            <a:spAutoFit/>
+          </a:bodyPr>
+          <a:lstStyle/>
+          <a:p>
+            <a:pPr>
+              <a:spcAft>
+                <a:spcPts val="500"/>
+              </a:spcAft>
+            </a:pPr>
+            <a:r>
+              <a:rPr sz="1600" b="1">
+                <a:solidFill>
+                  <a:srgbClr val="141E2E"/>
+                </a:solidFill>
+                <a:latin typeface="Apple SD Gothic Neo"/>
+              </a:rPr>
+              <a:t>다만 4곳이 계속 남는 건 주로 외국인 비율이 높아서입니다.</a:t>
+            </a:r>
+          </a:p>
+          <a:p>
+            <a:pPr>
+              <a:spcAft>
+                <a:spcPts val="500"/>
+              </a:spcAft>
+            </a:pPr>
+            <a:r>
+              <a:rPr sz="1400" b="0">
+                <a:solidFill>
+                  <a:srgbClr val="141E2E"/>
+                </a:solidFill>
+                <a:latin typeface="Apple SD Gothic Neo"/>
+              </a:rPr>
+              <a:t>접근성만 따로 보면 29개 동 중 2위~29위로 흩어집니다(1위가 가장 나쁨). 그래서 '병원이 가장 부족한 곳'이 아니라 '먼저 살펴볼 곳'으로 봅니다. 정답 데이터가 없어 정확도를 잰 것은 아닙니다.</a:t>
             </a:r>
           </a:p>
         </p:txBody>
@@ -4837,14 +6661,58 @@
       <p:grpSpPr/>
       <p:sp>
         <p:nvSpPr>
-          <p:cNvPr id="2" name="TextBox 1"/>
+          <p:cNvPr id="2" name="Rectangle 1"/>
+          <p:cNvSpPr/>
+          <p:nvPr/>
+        </p:nvSpPr>
+        <p:spPr>
+          <a:xfrm>
+            <a:off x="548640" y="411480"/>
+            <a:ext cx="73152" cy="548640"/>
+          </a:xfrm>
+          <a:prstGeom prst="rect">
+            <a:avLst/>
+          </a:prstGeom>
+          <a:solidFill>
+            <a:srgbClr val="0F9688"/>
+          </a:solidFill>
+          <a:ln>
+            <a:noFill/>
+          </a:ln>
+          <a:effectLst/>
+        </p:spPr>
+        <p:style>
+          <a:lnRef idx="1">
+            <a:schemeClr val="accent1"/>
+          </a:lnRef>
+          <a:fillRef idx="3">
+            <a:schemeClr val="accent1"/>
+          </a:fillRef>
+          <a:effectRef idx="2">
+            <a:schemeClr val="accent1"/>
+          </a:effectRef>
+          <a:fontRef idx="minor">
+            <a:schemeClr val="lt1"/>
+          </a:fontRef>
+        </p:style>
+        <p:txBody>
+          <a:bodyPr rtlCol="0" anchor="ctr"/>
+          <a:lstStyle/>
+          <a:p>
+            <a:pPr algn="ctr"/>
+          </a:p>
+        </p:txBody>
+      </p:sp>
+      <p:sp>
+        <p:nvSpPr>
+          <p:cNvPr id="3" name="TextBox 2"/>
           <p:cNvSpPr txBox="1"/>
           <p:nvPr/>
         </p:nvSpPr>
         <p:spPr>
           <a:xfrm>
-            <a:off x="548640" y="320040"/>
-            <a:ext cx="11064240" cy="822960"/>
+            <a:off x="777240" y="347472"/>
+            <a:ext cx="10515600" cy="731520"/>
           </a:xfrm>
           <a:prstGeom prst="rect">
             <a:avLst/>
@@ -4852,25 +6720,288 @@
           <a:noFill/>
         </p:spPr>
         <p:txBody>
-          <a:bodyPr wrap="square">
+          <a:bodyPr wrap="square" anchor="ctr">
             <a:spAutoFit/>
           </a:bodyPr>
           <a:lstStyle/>
           <a:p>
             <a:pPr>
               <a:spcAft>
-                <a:spcPts val="600"/>
+                <a:spcPts val="500"/>
               </a:spcAft>
             </a:pPr>
             <a:r>
               <a:rPr sz="2800" b="1">
                 <a:solidFill>
-                  <a:srgbClr val="1C5CAB"/>
+                  <a:srgbClr val="141E2E"/>
                 </a:solidFill>
                 <a:latin typeface="Apple SD Gothic Neo"/>
               </a:rPr>
-              <a:t>기대효과와 한계</a:t>
-            </a:r>
+              <a:t>만든 결과물</a:t>
+            </a:r>
+          </a:p>
+        </p:txBody>
+      </p:sp>
+      <p:pic>
+        <p:nvPicPr>
+          <p:cNvPr id="4" name="Picture 3" descr="gap_heatmap.png"/>
+          <p:cNvPicPr>
+            <a:picLocks noChangeAspect="1"/>
+          </p:cNvPicPr>
+          <p:nvPr/>
+        </p:nvPicPr>
+        <p:blipFill>
+          <a:blip r:embed="rId2"/>
+          <a:stretch>
+            <a:fillRect/>
+          </a:stretch>
+        </p:blipFill>
+        <p:spPr>
+          <a:xfrm>
+            <a:off x="457200" y="1371600"/>
+            <a:ext cx="6035040" cy="4310743"/>
+          </a:xfrm>
+          <a:prstGeom prst="rect">
+            <a:avLst/>
+          </a:prstGeom>
+        </p:spPr>
+      </p:pic>
+      <p:sp>
+        <p:nvSpPr>
+          <p:cNvPr id="5" name="Rectangle 4"/>
+          <p:cNvSpPr/>
+          <p:nvPr/>
+        </p:nvSpPr>
+        <p:spPr>
+          <a:xfrm>
+            <a:off x="6766560" y="1463040"/>
+            <a:ext cx="4873752" cy="4754880"/>
+          </a:xfrm>
+          <a:prstGeom prst="rect">
+            <a:avLst/>
+          </a:prstGeom>
+          <a:solidFill>
+            <a:srgbClr val="F6F8FA"/>
+          </a:solidFill>
+          <a:ln w="9525">
+            <a:solidFill>
+              <a:srgbClr val="E2E6EA"/>
+            </a:solidFill>
+          </a:ln>
+          <a:effectLst/>
+        </p:spPr>
+        <p:style>
+          <a:lnRef idx="1">
+            <a:schemeClr val="accent1"/>
+          </a:lnRef>
+          <a:fillRef idx="3">
+            <a:schemeClr val="accent1"/>
+          </a:fillRef>
+          <a:effectRef idx="2">
+            <a:schemeClr val="accent1"/>
+          </a:effectRef>
+          <a:fontRef idx="minor">
+            <a:schemeClr val="lt1"/>
+          </a:fontRef>
+        </p:style>
+        <p:txBody>
+          <a:bodyPr rtlCol="0" anchor="ctr"/>
+          <a:lstStyle/>
+          <a:p>
+            <a:pPr algn="ctr"/>
+          </a:p>
+        </p:txBody>
+      </p:sp>
+      <p:sp>
+        <p:nvSpPr>
+          <p:cNvPr id="6" name="Rectangle 5"/>
+          <p:cNvSpPr/>
+          <p:nvPr/>
+        </p:nvSpPr>
+        <p:spPr>
+          <a:xfrm>
+            <a:off x="6766560" y="1463040"/>
+            <a:ext cx="4873752" cy="64008"/>
+          </a:xfrm>
+          <a:prstGeom prst="rect">
+            <a:avLst/>
+          </a:prstGeom>
+          <a:solidFill>
+            <a:srgbClr val="0F9688"/>
+          </a:solidFill>
+          <a:ln>
+            <a:noFill/>
+          </a:ln>
+          <a:effectLst/>
+        </p:spPr>
+        <p:style>
+          <a:lnRef idx="1">
+            <a:schemeClr val="accent1"/>
+          </a:lnRef>
+          <a:fillRef idx="3">
+            <a:schemeClr val="accent1"/>
+          </a:fillRef>
+          <a:effectRef idx="2">
+            <a:schemeClr val="accent1"/>
+          </a:effectRef>
+          <a:fontRef idx="minor">
+            <a:schemeClr val="lt1"/>
+          </a:fontRef>
+        </p:style>
+        <p:txBody>
+          <a:bodyPr rtlCol="0" anchor="ctr"/>
+          <a:lstStyle/>
+          <a:p>
+            <a:pPr algn="ctr"/>
+          </a:p>
+        </p:txBody>
+      </p:sp>
+      <p:sp>
+        <p:nvSpPr>
+          <p:cNvPr id="7" name="TextBox 6"/>
+          <p:cNvSpPr txBox="1"/>
+          <p:nvPr/>
+        </p:nvSpPr>
+        <p:spPr>
+          <a:xfrm>
+            <a:off x="6995160" y="1691640"/>
+            <a:ext cx="4434840" cy="4480560"/>
+          </a:xfrm>
+          <a:prstGeom prst="rect">
+            <a:avLst/>
+          </a:prstGeom>
+          <a:noFill/>
+        </p:spPr>
+        <p:txBody>
+          <a:bodyPr wrap="square" anchor="t">
+            <a:spAutoFit/>
+          </a:bodyPr>
+          <a:lstStyle/>
+          <a:p>
+            <a:pPr>
+              <a:spcAft>
+                <a:spcPts val="500"/>
+              </a:spcAft>
+            </a:pPr>
+            <a:r>
+              <a:rPr sz="1700" b="1">
+                <a:solidFill>
+                  <a:srgbClr val="141E2E"/>
+                </a:solidFill>
+                <a:latin typeface="Apple SD Gothic Neo"/>
+              </a:rPr>
+              <a:t>구룡포읍 정책 카드 (격차 1위)</a:t>
+            </a:r>
+          </a:p>
+          <a:p>
+            <a:pPr>
+              <a:spcAft>
+                <a:spcPts val="500"/>
+              </a:spcAft>
+            </a:pPr>
+            <a:r>
+              <a:rPr sz="1200" b="0">
+                <a:solidFill>
+                  <a:srgbClr val="555F6D"/>
+                </a:solidFill>
+                <a:latin typeface="Apple SD Gothic Neo"/>
+              </a:rPr>
+              <a:t>[근거] 경북 1권역 조사에 따르면 병원/의원 이용 비율은 62.3%라고 합니다.</a:t>
+            </a:r>
+          </a:p>
+          <a:p>
+            <a:pPr>
+              <a:spcAft>
+                <a:spcPts val="500"/>
+              </a:spcAft>
+            </a:pPr>
+            <a:r>
+              <a:rPr sz="1200" b="0">
+                <a:solidFill>
+                  <a:srgbClr val="555F6D"/>
+                </a:solidFill>
+                <a:latin typeface="Apple SD Gothic Neo"/>
+              </a:rPr>
+              <a:t>포항시 구룡포읍의 외국인 주민 비율은 15.1%로, 읍 주민센터에 외국인 전용 건강 상담 창구를 설치하고 주 2회 간호사가 방문하여 기본 건강 검진 및 언어 지원을 제공합니다.</a:t>
+            </a:r>
+          </a:p>
+          <a:p>
+            <a:pPr>
+              <a:spcAft>
+                <a:spcPts val="500"/>
+              </a:spcAft>
+            </a:pPr>
+            <a:r>
+              <a:rPr sz="1200" b="0">
+                <a:solidFill>
+                  <a:srgbClr val="555F6D"/>
+                </a:solidFill>
+                <a:latin typeface="Apple SD Gothic Neo"/>
+              </a:rPr>
+              <a:t>이와 함께 지역 내 문화센터에서 모국어별 건강 교육 워크숍을 정기적으로 개최하여 예방 의료 인식을 높입니다.</a:t>
+            </a:r>
+          </a:p>
+        </p:txBody>
+      </p:sp>
+    </p:spTree>
+  </p:cSld>
+  <p:clrMapOvr>
+    <a:masterClrMapping/>
+  </p:clrMapOvr>
+</p:sld>
+</file>
+
+<file path=ppt/slides/slide8.xml><?xml version="1.0" encoding="utf-8"?>
+<p:sld xmlns:a="http://schemas.openxmlformats.org/drawingml/2006/main" xmlns:p="http://schemas.openxmlformats.org/presentationml/2006/main" xmlns:r="http://schemas.openxmlformats.org/officeDocument/2006/relationships">
+  <p:cSld>
+    <p:spTree>
+      <p:nvGrpSpPr>
+        <p:cNvPr id="1" name=""/>
+        <p:cNvGrpSpPr/>
+        <p:nvPr/>
+      </p:nvGrpSpPr>
+      <p:grpSpPr/>
+      <p:sp>
+        <p:nvSpPr>
+          <p:cNvPr id="2" name="Rectangle 1"/>
+          <p:cNvSpPr/>
+          <p:nvPr/>
+        </p:nvSpPr>
+        <p:spPr>
+          <a:xfrm>
+            <a:off x="548640" y="411480"/>
+            <a:ext cx="73152" cy="548640"/>
+          </a:xfrm>
+          <a:prstGeom prst="rect">
+            <a:avLst/>
+          </a:prstGeom>
+          <a:solidFill>
+            <a:srgbClr val="0F9688"/>
+          </a:solidFill>
+          <a:ln>
+            <a:noFill/>
+          </a:ln>
+          <a:effectLst/>
+        </p:spPr>
+        <p:style>
+          <a:lnRef idx="1">
+            <a:schemeClr val="accent1"/>
+          </a:lnRef>
+          <a:fillRef idx="3">
+            <a:schemeClr val="accent1"/>
+          </a:fillRef>
+          <a:effectRef idx="2">
+            <a:schemeClr val="accent1"/>
+          </a:effectRef>
+          <a:fontRef idx="minor">
+            <a:schemeClr val="lt1"/>
+          </a:fontRef>
+        </p:style>
+        <p:txBody>
+          <a:bodyPr rtlCol="0" anchor="ctr"/>
+          <a:lstStyle/>
+          <a:p>
+            <a:pPr algn="ctr"/>
           </a:p>
         </p:txBody>
       </p:sp>
@@ -4882,8 +7013,8 @@
         </p:nvSpPr>
         <p:spPr>
           <a:xfrm>
-            <a:off x="548640" y="1280160"/>
-            <a:ext cx="11064240" cy="5120640"/>
+            <a:off x="777240" y="347472"/>
+            <a:ext cx="10515600" cy="731520"/>
           </a:xfrm>
           <a:prstGeom prst="rect">
             <a:avLst/>
@@ -4891,119 +7022,378 @@
           <a:noFill/>
         </p:spPr>
         <p:txBody>
-          <a:bodyPr wrap="square">
+          <a:bodyPr wrap="square" anchor="ctr">
             <a:spAutoFit/>
           </a:bodyPr>
           <a:lstStyle/>
           <a:p>
             <a:pPr>
               <a:spcAft>
-                <a:spcPts val="600"/>
+                <a:spcPts val="500"/>
               </a:spcAft>
             </a:pPr>
             <a:r>
-              <a:rPr sz="1700" b="0">
+              <a:rPr sz="2800" b="1">
+                <a:solidFill>
+                  <a:srgbClr val="141E2E"/>
+                </a:solidFill>
                 <a:latin typeface="Apple SD Gothic Neo"/>
               </a:rPr>
-              <a:t>기대효과</a:t>
-            </a:r>
-          </a:p>
+              <a:t>기대하는 점과 한계</a:t>
+            </a:r>
+          </a:p>
+        </p:txBody>
+      </p:sp>
+      <p:sp>
+        <p:nvSpPr>
+          <p:cNvPr id="4" name="Rectangle 3"/>
+          <p:cNvSpPr/>
+          <p:nvPr/>
+        </p:nvSpPr>
+        <p:spPr>
+          <a:xfrm>
+            <a:off x="548640" y="1463040"/>
+            <a:ext cx="5440680" cy="4480560"/>
+          </a:xfrm>
+          <a:prstGeom prst="rect">
+            <a:avLst/>
+          </a:prstGeom>
+          <a:solidFill>
+            <a:srgbClr val="F6F8FA"/>
+          </a:solidFill>
+          <a:ln w="9525">
+            <a:solidFill>
+              <a:srgbClr val="E2E6EA"/>
+            </a:solidFill>
+          </a:ln>
+          <a:effectLst/>
+        </p:spPr>
+        <p:style>
+          <a:lnRef idx="1">
+            <a:schemeClr val="accent1"/>
+          </a:lnRef>
+          <a:fillRef idx="3">
+            <a:schemeClr val="accent1"/>
+          </a:fillRef>
+          <a:effectRef idx="2">
+            <a:schemeClr val="accent1"/>
+          </a:effectRef>
+          <a:fontRef idx="minor">
+            <a:schemeClr val="lt1"/>
+          </a:fontRef>
+        </p:style>
+        <p:txBody>
+          <a:bodyPr rtlCol="0" anchor="ctr"/>
+          <a:lstStyle/>
+          <a:p>
+            <a:pPr algn="ctr"/>
+          </a:p>
+        </p:txBody>
+      </p:sp>
+      <p:sp>
+        <p:nvSpPr>
+          <p:cNvPr id="5" name="Rectangle 4"/>
+          <p:cNvSpPr/>
+          <p:nvPr/>
+        </p:nvSpPr>
+        <p:spPr>
+          <a:xfrm>
+            <a:off x="548640" y="1463040"/>
+            <a:ext cx="5440680" cy="64008"/>
+          </a:xfrm>
+          <a:prstGeom prst="rect">
+            <a:avLst/>
+          </a:prstGeom>
+          <a:solidFill>
+            <a:srgbClr val="0F9688"/>
+          </a:solidFill>
+          <a:ln>
+            <a:noFill/>
+          </a:ln>
+          <a:effectLst/>
+        </p:spPr>
+        <p:style>
+          <a:lnRef idx="1">
+            <a:schemeClr val="accent1"/>
+          </a:lnRef>
+          <a:fillRef idx="3">
+            <a:schemeClr val="accent1"/>
+          </a:fillRef>
+          <a:effectRef idx="2">
+            <a:schemeClr val="accent1"/>
+          </a:effectRef>
+          <a:fontRef idx="minor">
+            <a:schemeClr val="lt1"/>
+          </a:fontRef>
+        </p:style>
+        <p:txBody>
+          <a:bodyPr rtlCol="0" anchor="ctr"/>
+          <a:lstStyle/>
+          <a:p>
+            <a:pPr algn="ctr"/>
+          </a:p>
+        </p:txBody>
+      </p:sp>
+      <p:sp>
+        <p:nvSpPr>
+          <p:cNvPr id="6" name="TextBox 5"/>
+          <p:cNvSpPr txBox="1"/>
+          <p:nvPr/>
+        </p:nvSpPr>
+        <p:spPr>
+          <a:xfrm>
+            <a:off x="822960" y="1737360"/>
+            <a:ext cx="4937760" cy="4114800"/>
+          </a:xfrm>
+          <a:prstGeom prst="rect">
+            <a:avLst/>
+          </a:prstGeom>
+          <a:noFill/>
+        </p:spPr>
+        <p:txBody>
+          <a:bodyPr wrap="square" anchor="t">
+            <a:spAutoFit/>
+          </a:bodyPr>
+          <a:lstStyle/>
           <a:p>
             <a:pPr>
               <a:spcAft>
-                <a:spcPts val="600"/>
+                <a:spcPts val="500"/>
               </a:spcAft>
             </a:pPr>
             <a:r>
-              <a:rPr sz="1700" b="0">
+              <a:rPr sz="2000" b="1">
+                <a:solidFill>
+                  <a:srgbClr val="0F9688"/>
+                </a:solidFill>
                 <a:latin typeface="Apple SD Gothic Neo"/>
               </a:rPr>
-              <a:t>• 근거 중심 행정: 어느 동을 먼저 볼지 데이터로 제시</a:t>
+              <a:t>기대하는 점</a:t>
             </a:r>
           </a:p>
           <a:p>
             <a:pPr>
               <a:spcAft>
-                <a:spcPts val="600"/>
+                <a:spcPts val="500"/>
               </a:spcAft>
             </a:pPr>
             <a:r>
-              <a:rPr sz="1700" b="0">
+              <a:rPr sz="1600" b="0">
+                <a:solidFill>
+                  <a:srgbClr val="141E2E"/>
+                </a:solidFill>
                 <a:latin typeface="Apple SD Gothic Neo"/>
               </a:rPr>
-              <a:t>• 예산 효율화: 상위 4곳은 지표 선택에 흔들리지 않는 우선 후보</a:t>
+              <a:t>어느 동부터 살펴볼지 데이터로 정할 수 있습니다.</a:t>
             </a:r>
           </a:p>
           <a:p>
             <a:pPr>
               <a:spcAft>
-                <a:spcPts val="600"/>
+                <a:spcPts val="500"/>
               </a:spcAft>
             </a:pPr>
             <a:r>
-              <a:rPr sz="1700" b="0">
+              <a:rPr sz="1600" b="0">
+                <a:solidFill>
+                  <a:srgbClr val="141E2E"/>
+                </a:solidFill>
                 <a:latin typeface="Apple SD Gothic Neo"/>
               </a:rPr>
-              <a:t>• 외국인 주민 정주 여건 개선</a:t>
+              <a:t>상위 4곳은 기준을 바꿔도 흔들리지 않아서, 예산을 먼저 쓸 후보로 볼 수 있습니다.</a:t>
             </a:r>
           </a:p>
           <a:p>
             <a:pPr>
               <a:spcAft>
-                <a:spcPts val="600"/>
+                <a:spcPts val="500"/>
               </a:spcAft>
             </a:pPr>
-          </a:p>
+            <a:r>
+              <a:rPr sz="1600" b="0">
+                <a:solidFill>
+                  <a:srgbClr val="141E2E"/>
+                </a:solidFill>
+                <a:latin typeface="Apple SD Gothic Neo"/>
+              </a:rPr>
+              <a:t>외국인 주민이 병원을 이용하기 편해지는 쪽으로 이어집니다.</a:t>
+            </a:r>
+          </a:p>
+        </p:txBody>
+      </p:sp>
+      <p:sp>
+        <p:nvSpPr>
+          <p:cNvPr id="7" name="Rectangle 6"/>
+          <p:cNvSpPr/>
+          <p:nvPr/>
+        </p:nvSpPr>
+        <p:spPr>
+          <a:xfrm>
+            <a:off x="6199632" y="1463040"/>
+            <a:ext cx="5440680" cy="4480560"/>
+          </a:xfrm>
+          <a:prstGeom prst="rect">
+            <a:avLst/>
+          </a:prstGeom>
+          <a:solidFill>
+            <a:srgbClr val="F6F8FA"/>
+          </a:solidFill>
+          <a:ln w="9525">
+            <a:solidFill>
+              <a:srgbClr val="E2E6EA"/>
+            </a:solidFill>
+          </a:ln>
+          <a:effectLst/>
+        </p:spPr>
+        <p:style>
+          <a:lnRef idx="1">
+            <a:schemeClr val="accent1"/>
+          </a:lnRef>
+          <a:fillRef idx="3">
+            <a:schemeClr val="accent1"/>
+          </a:fillRef>
+          <a:effectRef idx="2">
+            <a:schemeClr val="accent1"/>
+          </a:effectRef>
+          <a:fontRef idx="minor">
+            <a:schemeClr val="lt1"/>
+          </a:fontRef>
+        </p:style>
+        <p:txBody>
+          <a:bodyPr rtlCol="0" anchor="ctr"/>
+          <a:lstStyle/>
+          <a:p>
+            <a:pPr algn="ctr"/>
+          </a:p>
+        </p:txBody>
+      </p:sp>
+      <p:sp>
+        <p:nvSpPr>
+          <p:cNvPr id="8" name="Rectangle 7"/>
+          <p:cNvSpPr/>
+          <p:nvPr/>
+        </p:nvSpPr>
+        <p:spPr>
+          <a:xfrm>
+            <a:off x="6199632" y="1463040"/>
+            <a:ext cx="5440680" cy="64008"/>
+          </a:xfrm>
+          <a:prstGeom prst="rect">
+            <a:avLst/>
+          </a:prstGeom>
+          <a:solidFill>
+            <a:srgbClr val="555F6D"/>
+          </a:solidFill>
+          <a:ln>
+            <a:noFill/>
+          </a:ln>
+          <a:effectLst/>
+        </p:spPr>
+        <p:style>
+          <a:lnRef idx="1">
+            <a:schemeClr val="accent1"/>
+          </a:lnRef>
+          <a:fillRef idx="3">
+            <a:schemeClr val="accent1"/>
+          </a:fillRef>
+          <a:effectRef idx="2">
+            <a:schemeClr val="accent1"/>
+          </a:effectRef>
+          <a:fontRef idx="minor">
+            <a:schemeClr val="lt1"/>
+          </a:fontRef>
+        </p:style>
+        <p:txBody>
+          <a:bodyPr rtlCol="0" anchor="ctr"/>
+          <a:lstStyle/>
+          <a:p>
+            <a:pPr algn="ctr"/>
+          </a:p>
+        </p:txBody>
+      </p:sp>
+      <p:sp>
+        <p:nvSpPr>
+          <p:cNvPr id="9" name="TextBox 8"/>
+          <p:cNvSpPr txBox="1"/>
+          <p:nvPr/>
+        </p:nvSpPr>
+        <p:spPr>
+          <a:xfrm>
+            <a:off x="6473952" y="1737360"/>
+            <a:ext cx="4937760" cy="4114800"/>
+          </a:xfrm>
+          <a:prstGeom prst="rect">
+            <a:avLst/>
+          </a:prstGeom>
+          <a:noFill/>
+        </p:spPr>
+        <p:txBody>
+          <a:bodyPr wrap="square" anchor="t">
+            <a:spAutoFit/>
+          </a:bodyPr>
+          <a:lstStyle/>
           <a:p>
             <a:pPr>
               <a:spcAft>
-                <a:spcPts val="600"/>
+                <a:spcPts val="500"/>
               </a:spcAft>
             </a:pPr>
             <a:r>
-              <a:rPr sz="1700" b="0">
+              <a:rPr sz="2000" b="1">
+                <a:solidFill>
+                  <a:srgbClr val="555F6D"/>
+                </a:solidFill>
                 <a:latin typeface="Apple SD Gothic Neo"/>
               </a:rPr>
-              <a:t>한계 (먼저 밝힙니다)</a:t>
+              <a:t>한계</a:t>
             </a:r>
           </a:p>
           <a:p>
             <a:pPr>
               <a:spcAft>
-                <a:spcPts val="600"/>
+                <a:spcPts val="500"/>
               </a:spcAft>
             </a:pPr>
             <a:r>
-              <a:rPr sz="1700" b="0">
+              <a:rPr sz="1600" b="0">
+                <a:solidFill>
+                  <a:srgbClr val="141E2E"/>
+                </a:solidFill>
                 <a:latin typeface="Apple SD Gothic Neo"/>
               </a:rPr>
-              <a:t>• 행정동별로 달라지는 수요 신호(체감 결핍)는 없음 — 배경 근거는 경북 1권역·전국 수치</a:t>
+              <a:t>동마다 다른 체감 결핍은 담지 못했습니다. 배경 조사는 경북 1권역·전국 수치입니다.</a:t>
             </a:r>
           </a:p>
           <a:p>
             <a:pPr>
               <a:spcAft>
-                <a:spcPts val="600"/>
+                <a:spcPts val="500"/>
               </a:spcAft>
             </a:pPr>
             <a:r>
-              <a:rPr sz="1700" b="0">
+              <a:rPr sz="1600" b="0">
+                <a:solidFill>
+                  <a:srgbClr val="141E2E"/>
+                </a:solidFill>
                 <a:latin typeface="Apple SD Gothic Neo"/>
               </a:rPr>
-              <a:t>• 의료 단일 지표, 수요점은 총인구 기준</a:t>
+              <a:t>지표는 의료 하나뿐입니다. 방법을 바꿔 비교는 했지만, 실제 불편과 맞는지 확인할 현장 자료는 아직 없습니다.</a:t>
             </a:r>
           </a:p>
           <a:p>
             <a:pPr>
               <a:spcAft>
-                <a:spcPts val="600"/>
+                <a:spcPts val="500"/>
               </a:spcAft>
             </a:pPr>
             <a:r>
-              <a:rPr sz="1700" b="0">
+              <a:rPr sz="1600" b="0">
+                <a:solidFill>
+                  <a:srgbClr val="141E2E"/>
+                </a:solidFill>
                 <a:latin typeface="Apple SD Gothic Neo"/>
               </a:rPr>
-              <a:t>• 다른 도시 이식은 읍면동별 외국인 주민 데이터 확보가 선결 조건</a:t>
+              <a:t>다른 도시에 쓰려면 읍면동별 외국인 주민 자료가 먼저 있어야 합니다.</a:t>
             </a:r>
           </a:p>
         </p:txBody>
